--- a/slides/session-2-context-engineering.pptx
+++ b/slides/session-2-context-engineering.pptx
@@ -27,6 +27,7 @@
     <p:sldId id="275" r:id="rId26"/>
     <p:sldId id="276" r:id="rId27"/>
     <p:sldId id="277" r:id="rId28"/>
+    <p:sldId id="278" r:id="rId29"/>
   </p:sldIdLst>
   <p:sldSz cx="12191695" cy="6858000" type="screen4x3"/>
   <p:notesSz cx="6858000" cy="9144000"/>
@@ -6154,52 +6155,16 @@
       <p:grpSpPr/>
       <p:sp>
         <p:nvSpPr>
-          <p:cNvPr id="2" name="TextBox 1"/>
-          <p:cNvSpPr txBox="1"/>
-          <p:nvPr/>
-        </p:nvSpPr>
-        <p:spPr>
-          <a:xfrm>
-            <a:off x="457200" y="320040"/>
-            <a:ext cx="9144000" cy="731520"/>
-          </a:xfrm>
-          <a:prstGeom prst="rect">
-            <a:avLst/>
-          </a:prstGeom>
-          <a:noFill/>
-        </p:spPr>
-        <p:txBody>
-          <a:bodyPr wrap="square">
-            <a:spAutoFit/>
-          </a:bodyPr>
-          <a:lstStyle/>
-          <a:p>
-            <a:pPr algn="l">
-              <a:defRPr sz="2800" b="1" i="0">
-                <a:solidFill>
-                  <a:srgbClr val="E8ECF4"/>
-                </a:solidFill>
-                <a:latin typeface="Arial"/>
-              </a:defRPr>
-            </a:pPr>
-            <a:r>
-              <a:t>The Examples/ Folder</a:t>
-            </a:r>
-          </a:p>
-        </p:txBody>
-      </p:sp>
-      <p:sp>
-        <p:nvSpPr>
-          <p:cNvPr id="3" name="Rounded Rectangle 2"/>
+          <p:cNvPr id="2" name="Rectangle 1"/>
           <p:cNvSpPr/>
           <p:nvPr/>
         </p:nvSpPr>
         <p:spPr>
           <a:xfrm>
-            <a:off x="10515600" y="960120"/>
-            <a:ext cx="1188720" cy="365760"/>
-          </a:xfrm>
-          <a:prstGeom prst="roundRect">
+            <a:off x="0" y="0"/>
+            <a:ext cx="73152" cy="6858000"/>
+          </a:xfrm>
+          <a:prstGeom prst="rect">
             <a:avLst/>
           </a:prstGeom>
           <a:solidFill>
@@ -6233,14 +6198,14 @@
       </p:sp>
       <p:sp>
         <p:nvSpPr>
-          <p:cNvPr id="4" name="TextBox 3"/>
+          <p:cNvPr id="3" name="TextBox 2"/>
           <p:cNvSpPr txBox="1"/>
           <p:nvPr/>
         </p:nvSpPr>
         <p:spPr>
           <a:xfrm>
-            <a:off x="10515600" y="987552"/>
-            <a:ext cx="1188720" cy="365760"/>
+            <a:off x="548640" y="320040"/>
+            <a:ext cx="10972800" cy="777240"/>
           </a:xfrm>
           <a:prstGeom prst="rect">
             <a:avLst/>
@@ -6253,342 +6218,30 @@
           </a:bodyPr>
           <a:lstStyle/>
           <a:p>
-            <a:pPr algn="ctr">
-              <a:defRPr sz="1200" b="1" i="0">
-                <a:solidFill>
-                  <a:srgbClr val="0A0D12"/>
-                </a:solidFill>
-                <a:latin typeface="Courier New"/>
+            <a:pPr algn="l">
+              <a:defRPr sz="3000" b="1" i="0">
+                <a:solidFill>
+                  <a:srgbClr val="E8ECF4"/>
+                </a:solidFill>
+                <a:latin typeface="Arial"/>
               </a:defRPr>
             </a:pPr>
             <a:r>
-              <a:t>DIR</a:t>
-            </a:r>
-          </a:p>
-        </p:txBody>
-      </p:sp>
-      <p:sp>
-        <p:nvSpPr>
-          <p:cNvPr id="5" name="Rounded Rectangle 4"/>
+              <a:t>When the PRP is wrong</a:t>
+            </a:r>
+          </a:p>
+        </p:txBody>
+      </p:sp>
+      <p:sp>
+        <p:nvSpPr>
+          <p:cNvPr id="4" name="Rectangle 3"/>
           <p:cNvSpPr/>
           <p:nvPr/>
         </p:nvSpPr>
         <p:spPr>
           <a:xfrm>
-            <a:off x="457200" y="1188720"/>
-            <a:ext cx="11274552" cy="4754880"/>
-          </a:xfrm>
-          <a:prstGeom prst="roundRect">
-            <a:avLst/>
-          </a:prstGeom>
-          <a:solidFill>
-            <a:srgbClr val="0A0D12"/>
-          </a:solidFill>
-          <a:ln>
-            <a:solidFill>
-              <a:srgbClr val="313244"/>
-            </a:solidFill>
-          </a:ln>
-        </p:spPr>
-        <p:style>
-          <a:lnRef idx="1">
-            <a:schemeClr val="accent1"/>
-          </a:lnRef>
-          <a:fillRef idx="3">
-            <a:schemeClr val="accent1"/>
-          </a:fillRef>
-          <a:effectRef idx="2">
-            <a:schemeClr val="accent1"/>
-          </a:effectRef>
-          <a:fontRef idx="minor">
-            <a:schemeClr val="lt1"/>
-          </a:fontRef>
-        </p:style>
-        <p:txBody>
-          <a:bodyPr rtlCol="0" anchor="ctr"/>
-          <a:lstStyle/>
-          <a:p>
-            <a:pPr algn="ctr"/>
-          </a:p>
-        </p:txBody>
-      </p:sp>
-      <p:sp>
-        <p:nvSpPr>
-          <p:cNvPr id="6" name="Oval 5"/>
-          <p:cNvSpPr/>
-          <p:nvPr/>
-        </p:nvSpPr>
-        <p:spPr>
-          <a:xfrm>
-            <a:off x="731520" y="1417320"/>
-            <a:ext cx="164592" cy="164592"/>
-          </a:xfrm>
-          <a:prstGeom prst="ellipse">
-            <a:avLst/>
-          </a:prstGeom>
-          <a:solidFill>
-            <a:srgbClr val="F38BA8"/>
-          </a:solidFill>
-          <a:ln>
-            <a:noFill/>
-          </a:ln>
-        </p:spPr>
-        <p:style>
-          <a:lnRef idx="1">
-            <a:schemeClr val="accent1"/>
-          </a:lnRef>
-          <a:fillRef idx="3">
-            <a:schemeClr val="accent1"/>
-          </a:fillRef>
-          <a:effectRef idx="2">
-            <a:schemeClr val="accent1"/>
-          </a:effectRef>
-          <a:fontRef idx="minor">
-            <a:schemeClr val="lt1"/>
-          </a:fontRef>
-        </p:style>
-        <p:txBody>
-          <a:bodyPr rtlCol="0" anchor="ctr"/>
-          <a:lstStyle/>
-          <a:p>
-            <a:pPr algn="ctr"/>
-          </a:p>
-        </p:txBody>
-      </p:sp>
-      <p:sp>
-        <p:nvSpPr>
-          <p:cNvPr id="7" name="Oval 6"/>
-          <p:cNvSpPr/>
-          <p:nvPr/>
-        </p:nvSpPr>
-        <p:spPr>
-          <a:xfrm>
-            <a:off x="1051560" y="1417320"/>
-            <a:ext cx="164592" cy="164592"/>
-          </a:xfrm>
-          <a:prstGeom prst="ellipse">
-            <a:avLst/>
-          </a:prstGeom>
-          <a:solidFill>
-            <a:srgbClr val="F9E2AF"/>
-          </a:solidFill>
-          <a:ln>
-            <a:noFill/>
-          </a:ln>
-        </p:spPr>
-        <p:style>
-          <a:lnRef idx="1">
-            <a:schemeClr val="accent1"/>
-          </a:lnRef>
-          <a:fillRef idx="3">
-            <a:schemeClr val="accent1"/>
-          </a:fillRef>
-          <a:effectRef idx="2">
-            <a:schemeClr val="accent1"/>
-          </a:effectRef>
-          <a:fontRef idx="minor">
-            <a:schemeClr val="lt1"/>
-          </a:fontRef>
-        </p:style>
-        <p:txBody>
-          <a:bodyPr rtlCol="0" anchor="ctr"/>
-          <a:lstStyle/>
-          <a:p>
-            <a:pPr algn="ctr"/>
-          </a:p>
-        </p:txBody>
-      </p:sp>
-      <p:sp>
-        <p:nvSpPr>
-          <p:cNvPr id="8" name="Oval 7"/>
-          <p:cNvSpPr/>
-          <p:nvPr/>
-        </p:nvSpPr>
-        <p:spPr>
-          <a:xfrm>
-            <a:off x="1371600" y="1417320"/>
-            <a:ext cx="164592" cy="164592"/>
-          </a:xfrm>
-          <a:prstGeom prst="ellipse">
-            <a:avLst/>
-          </a:prstGeom>
-          <a:solidFill>
-            <a:srgbClr val="A6E3A1"/>
-          </a:solidFill>
-          <a:ln>
-            <a:noFill/>
-          </a:ln>
-        </p:spPr>
-        <p:style>
-          <a:lnRef idx="1">
-            <a:schemeClr val="accent1"/>
-          </a:lnRef>
-          <a:fillRef idx="3">
-            <a:schemeClr val="accent1"/>
-          </a:fillRef>
-          <a:effectRef idx="2">
-            <a:schemeClr val="accent1"/>
-          </a:effectRef>
-          <a:fontRef idx="minor">
-            <a:schemeClr val="lt1"/>
-          </a:fontRef>
-        </p:style>
-        <p:txBody>
-          <a:bodyPr rtlCol="0" anchor="ctr"/>
-          <a:lstStyle/>
-          <a:p>
-            <a:pPr algn="ctr"/>
-          </a:p>
-        </p:txBody>
-      </p:sp>
-      <p:sp>
-        <p:nvSpPr>
-          <p:cNvPr id="9" name="TextBox 8"/>
-          <p:cNvSpPr txBox="1"/>
-          <p:nvPr/>
-        </p:nvSpPr>
-        <p:spPr>
-          <a:xfrm>
-            <a:off x="731520" y="1920240"/>
-            <a:ext cx="10698480" cy="3977640"/>
-          </a:xfrm>
-          <a:prstGeom prst="rect">
-            <a:avLst/>
-          </a:prstGeom>
-          <a:noFill/>
-        </p:spPr>
-        <p:txBody>
-          <a:bodyPr wrap="none">
-            <a:spAutoFit/>
-          </a:bodyPr>
-          <a:lstStyle/>
-          <a:p>
-            <a:pPr algn="l">
-              <a:defRPr sz="1300" b="0" i="0">
-                <a:solidFill>
-                  <a:srgbClr val="E8ECF4"/>
-                </a:solidFill>
-                <a:latin typeface="Courier New"/>
-              </a:defRPr>
-            </a:pPr>
-            <a:r>
-              <a:t>examples/</a:t>
-            </a:r>
-            <a:br/>
-            <a:r>
-              <a:t>  sample-event-plan.json     "Make output look like this"</a:t>
-            </a:r>
-            <a:br/>
-            <a:r>
-              <a:t>  sample-announcement.md     "Match this tone and format"</a:t>
-            </a:r>
-            <a:br/>
-            <a:r>
-              <a:t>  sample-schedule.md         "Follow this structure"</a:t>
-            </a:r>
-            <a:br/>
-            <a:br/>
-            <a:r>
-              <a:t>The AI pattern-matches against your examples.</a:t>
-            </a:r>
-            <a:br/>
-            <a:br/>
-            <a:r>
-              <a:t>  - Specific JSON schema      -&gt;  show a sample file</a:t>
-            </a:r>
-            <a:br/>
-            <a:r>
-              <a:t>  - Particular email tone     -&gt;  include a real example</a:t>
-            </a:r>
-            <a:br/>
-            <a:r>
-              <a:t>  - Consistent formatting     -&gt;  provide a template</a:t>
-            </a:r>
-          </a:p>
-        </p:txBody>
-      </p:sp>
-      <p:sp>
-        <p:nvSpPr>
-          <p:cNvPr id="10" name="TextBox 9"/>
-          <p:cNvSpPr txBox="1"/>
-          <p:nvPr/>
-        </p:nvSpPr>
-        <p:spPr>
-          <a:xfrm>
-            <a:off x="457200" y="6126480"/>
-            <a:ext cx="11274552" cy="457200"/>
-          </a:xfrm>
-          <a:prstGeom prst="rect">
-            <a:avLst/>
-          </a:prstGeom>
-          <a:noFill/>
-        </p:spPr>
-        <p:txBody>
-          <a:bodyPr wrap="square">
-            <a:spAutoFit/>
-          </a:bodyPr>
-          <a:lstStyle/>
-          <a:p>
-            <a:pPr algn="ctr">
-              <a:defRPr sz="1600" b="1" i="0">
-                <a:solidFill>
-                  <a:srgbClr val="E8ECF4"/>
-                </a:solidFill>
-                <a:latin typeface="Arial"/>
-              </a:defRPr>
-            </a:pPr>
-            <a:r>
-              <a:t>Show it. Don't describe it.</a:t>
-            </a:r>
-          </a:p>
-        </p:txBody>
-      </p:sp>
-      <p:sp>
-        <p:nvSpPr>
-          <p:cNvPr id="11" name="TextBox 10"/>
-          <p:cNvSpPr txBox="1"/>
-          <p:nvPr/>
-        </p:nvSpPr>
-        <p:spPr>
-          <a:xfrm>
-            <a:off x="457200" y="6537960"/>
-            <a:ext cx="11274552" cy="548640"/>
-          </a:xfrm>
-          <a:prstGeom prst="rect">
-            <a:avLst/>
-          </a:prstGeom>
-          <a:noFill/>
-        </p:spPr>
-        <p:txBody>
-          <a:bodyPr wrap="square">
-            <a:spAutoFit/>
-          </a:bodyPr>
-          <a:lstStyle/>
-          <a:p>
-            <a:pPr algn="ctr">
-              <a:defRPr sz="1300" b="0" i="1">
-                <a:solidFill>
-                  <a:srgbClr val="9CA3B4"/>
-                </a:solidFill>
-                <a:latin typeface="Arial"/>
-              </a:defRPr>
-            </a:pPr>
-            <a:r>
-              <a:t>The design slop sites all look the same because the AI had no examples to differentiate against.</a:t>
-            </a:r>
-          </a:p>
-        </p:txBody>
-      </p:sp>
-      <p:sp>
-        <p:nvSpPr>
-          <p:cNvPr id="12" name="Rectangle 11"/>
-          <p:cNvSpPr/>
-          <p:nvPr/>
-        </p:nvSpPr>
-        <p:spPr>
-          <a:xfrm>
-            <a:off x="0" y="6720840"/>
-            <a:ext cx="12191695" cy="137160"/>
+            <a:off x="548640" y="1143000"/>
+            <a:ext cx="2286000" cy="54864"/>
           </a:xfrm>
           <a:prstGeom prst="rect">
             <a:avLst/>
@@ -6624,7 +6277,791 @@
       </p:sp>
       <p:sp>
         <p:nvSpPr>
+          <p:cNvPr id="5" name="TextBox 4"/>
+          <p:cNvSpPr txBox="1"/>
+          <p:nvPr/>
+        </p:nvSpPr>
+        <p:spPr>
+          <a:xfrm>
+            <a:off x="548640" y="1325880"/>
+            <a:ext cx="10972800" cy="502920"/>
+          </a:xfrm>
+          <a:prstGeom prst="rect">
+            <a:avLst/>
+          </a:prstGeom>
+          <a:noFill/>
+        </p:spPr>
+        <p:txBody>
+          <a:bodyPr wrap="square">
+            <a:spAutoFit/>
+          </a:bodyPr>
+          <a:lstStyle/>
+          <a:p>
+            <a:pPr algn="l">
+              <a:defRPr sz="1700" b="0" i="1">
+                <a:solidFill>
+                  <a:srgbClr val="9CA3B4"/>
+                </a:solidFill>
+                <a:latin typeface="Arial"/>
+              </a:defRPr>
+            </a:pPr>
+            <a:r>
+              <a:t>Most failures are catchable at review time — before /execute-prp runs.</a:t>
+            </a:r>
+          </a:p>
+        </p:txBody>
+      </p:sp>
+      <p:sp>
+        <p:nvSpPr>
+          <p:cNvPr id="6" name="Rectangle 5"/>
+          <p:cNvSpPr/>
+          <p:nvPr/>
+        </p:nvSpPr>
+        <p:spPr>
+          <a:xfrm>
+            <a:off x="548640" y="1965960"/>
+            <a:ext cx="11155680" cy="36576"/>
+          </a:xfrm>
+          <a:prstGeom prst="rect">
+            <a:avLst/>
+          </a:prstGeom>
+          <a:solidFill>
+            <a:srgbClr val="E8853D"/>
+          </a:solidFill>
+          <a:ln>
+            <a:noFill/>
+          </a:ln>
+        </p:spPr>
+        <p:style>
+          <a:lnRef idx="1">
+            <a:schemeClr val="accent1"/>
+          </a:lnRef>
+          <a:fillRef idx="3">
+            <a:schemeClr val="accent1"/>
+          </a:fillRef>
+          <a:effectRef idx="2">
+            <a:schemeClr val="accent1"/>
+          </a:effectRef>
+          <a:fontRef idx="minor">
+            <a:schemeClr val="lt1"/>
+          </a:fontRef>
+        </p:style>
+        <p:txBody>
+          <a:bodyPr rtlCol="0" anchor="ctr"/>
+          <a:lstStyle/>
+          <a:p>
+            <a:pPr algn="ctr"/>
+          </a:p>
+        </p:txBody>
+      </p:sp>
+      <p:sp>
+        <p:nvSpPr>
+          <p:cNvPr id="7" name="TextBox 6"/>
+          <p:cNvSpPr txBox="1"/>
+          <p:nvPr/>
+        </p:nvSpPr>
+        <p:spPr>
+          <a:xfrm>
+            <a:off x="548640" y="1554480"/>
+            <a:ext cx="3291840" cy="365760"/>
+          </a:xfrm>
+          <a:prstGeom prst="rect">
+            <a:avLst/>
+          </a:prstGeom>
+          <a:noFill/>
+        </p:spPr>
+        <p:txBody>
+          <a:bodyPr wrap="square">
+            <a:spAutoFit/>
+          </a:bodyPr>
+          <a:lstStyle/>
+          <a:p>
+            <a:pPr algn="l">
+              <a:defRPr sz="1400" b="1" i="0">
+                <a:solidFill>
+                  <a:srgbClr val="E8853D"/>
+                </a:solidFill>
+                <a:latin typeface="Arial"/>
+              </a:defRPr>
+            </a:pPr>
+            <a:r>
+              <a:t>Symptom</a:t>
+            </a:r>
+          </a:p>
+        </p:txBody>
+      </p:sp>
+      <p:sp>
+        <p:nvSpPr>
+          <p:cNvPr id="8" name="TextBox 7"/>
+          <p:cNvSpPr txBox="1"/>
+          <p:nvPr/>
+        </p:nvSpPr>
+        <p:spPr>
+          <a:xfrm>
+            <a:off x="3931920" y="1554480"/>
+            <a:ext cx="2926080" cy="365760"/>
+          </a:xfrm>
+          <a:prstGeom prst="rect">
+            <a:avLst/>
+          </a:prstGeom>
+          <a:noFill/>
+        </p:spPr>
+        <p:txBody>
+          <a:bodyPr wrap="square">
+            <a:spAutoFit/>
+          </a:bodyPr>
+          <a:lstStyle/>
+          <a:p>
+            <a:pPr algn="l">
+              <a:defRPr sz="1400" b="1" i="0">
+                <a:solidFill>
+                  <a:srgbClr val="E8853D"/>
+                </a:solidFill>
+                <a:latin typeface="Arial"/>
+              </a:defRPr>
+            </a:pPr>
+            <a:r>
+              <a:t>How you spot it</a:t>
+            </a:r>
+          </a:p>
+        </p:txBody>
+      </p:sp>
+      <p:sp>
+        <p:nvSpPr>
+          <p:cNvPr id="9" name="TextBox 8"/>
+          <p:cNvSpPr txBox="1"/>
+          <p:nvPr/>
+        </p:nvSpPr>
+        <p:spPr>
+          <a:xfrm>
+            <a:off x="6949440" y="1554480"/>
+            <a:ext cx="4754880" cy="365760"/>
+          </a:xfrm>
+          <a:prstGeom prst="rect">
+            <a:avLst/>
+          </a:prstGeom>
+          <a:noFill/>
+        </p:spPr>
+        <p:txBody>
+          <a:bodyPr wrap="square">
+            <a:spAutoFit/>
+          </a:bodyPr>
+          <a:lstStyle/>
+          <a:p>
+            <a:pPr algn="l">
+              <a:defRPr sz="1400" b="1" i="0">
+                <a:solidFill>
+                  <a:srgbClr val="E8853D"/>
+                </a:solidFill>
+                <a:latin typeface="Arial"/>
+              </a:defRPr>
+            </a:pPr>
+            <a:r>
+              <a:t>How to fix</a:t>
+            </a:r>
+          </a:p>
+        </p:txBody>
+      </p:sp>
+      <p:sp>
+        <p:nvSpPr>
+          <p:cNvPr id="10" name="Rectangle 9"/>
+          <p:cNvSpPr/>
+          <p:nvPr/>
+        </p:nvSpPr>
+        <p:spPr>
+          <a:xfrm>
+            <a:off x="548640" y="2020824"/>
+            <a:ext cx="11155680" cy="18288"/>
+          </a:xfrm>
+          <a:prstGeom prst="rect">
+            <a:avLst/>
+          </a:prstGeom>
+          <a:solidFill>
+            <a:srgbClr val="313244"/>
+          </a:solidFill>
+          <a:ln>
+            <a:noFill/>
+          </a:ln>
+        </p:spPr>
+        <p:style>
+          <a:lnRef idx="1">
+            <a:schemeClr val="accent1"/>
+          </a:lnRef>
+          <a:fillRef idx="3">
+            <a:schemeClr val="accent1"/>
+          </a:fillRef>
+          <a:effectRef idx="2">
+            <a:schemeClr val="accent1"/>
+          </a:effectRef>
+          <a:fontRef idx="minor">
+            <a:schemeClr val="lt1"/>
+          </a:fontRef>
+        </p:style>
+        <p:txBody>
+          <a:bodyPr rtlCol="0" anchor="ctr"/>
+          <a:lstStyle/>
+          <a:p>
+            <a:pPr algn="ctr"/>
+          </a:p>
+        </p:txBody>
+      </p:sp>
+      <p:sp>
+        <p:nvSpPr>
+          <p:cNvPr id="11" name="Rectangle 10"/>
+          <p:cNvSpPr/>
+          <p:nvPr/>
+        </p:nvSpPr>
+        <p:spPr>
+          <a:xfrm>
+            <a:off x="502920" y="2093976"/>
+            <a:ext cx="11247120" cy="678942"/>
+          </a:xfrm>
+          <a:prstGeom prst="rect">
+            <a:avLst/>
+          </a:prstGeom>
+          <a:solidFill>
+            <a:srgbClr val="181D27"/>
+          </a:solidFill>
+          <a:ln>
+            <a:noFill/>
+          </a:ln>
+        </p:spPr>
+        <p:style>
+          <a:lnRef idx="1">
+            <a:schemeClr val="accent1"/>
+          </a:lnRef>
+          <a:fillRef idx="3">
+            <a:schemeClr val="accent1"/>
+          </a:fillRef>
+          <a:effectRef idx="2">
+            <a:schemeClr val="accent1"/>
+          </a:effectRef>
+          <a:fontRef idx="minor">
+            <a:schemeClr val="lt1"/>
+          </a:fontRef>
+        </p:style>
+        <p:txBody>
+          <a:bodyPr rtlCol="0" anchor="ctr"/>
+          <a:lstStyle/>
+          <a:p>
+            <a:pPr algn="ctr"/>
+          </a:p>
+        </p:txBody>
+      </p:sp>
+      <p:sp>
+        <p:nvSpPr>
+          <p:cNvPr id="12" name="TextBox 11"/>
+          <p:cNvSpPr txBox="1"/>
+          <p:nvPr/>
+        </p:nvSpPr>
+        <p:spPr>
+          <a:xfrm>
+            <a:off x="548640" y="2176272"/>
+            <a:ext cx="3291840" cy="633222"/>
+          </a:xfrm>
+          <a:prstGeom prst="rect">
+            <a:avLst/>
+          </a:prstGeom>
+          <a:noFill/>
+        </p:spPr>
+        <p:txBody>
+          <a:bodyPr wrap="square">
+            <a:spAutoFit/>
+          </a:bodyPr>
+          <a:lstStyle/>
+          <a:p>
+            <a:pPr algn="l">
+              <a:defRPr sz="1200" b="0" i="0">
+                <a:solidFill>
+                  <a:srgbClr val="E8ECF4"/>
+                </a:solidFill>
+                <a:latin typeface="Arial"/>
+              </a:defRPr>
+            </a:pPr>
+            <a:r>
+              <a:t>PRP missed a constraint from INITIAL.md</a:t>
+            </a:r>
+          </a:p>
+        </p:txBody>
+      </p:sp>
+      <p:sp>
+        <p:nvSpPr>
           <p:cNvPr id="13" name="TextBox 12"/>
+          <p:cNvSpPr txBox="1"/>
+          <p:nvPr/>
+        </p:nvSpPr>
+        <p:spPr>
+          <a:xfrm>
+            <a:off x="3931920" y="2176272"/>
+            <a:ext cx="2926080" cy="633222"/>
+          </a:xfrm>
+          <a:prstGeom prst="rect">
+            <a:avLst/>
+          </a:prstGeom>
+          <a:noFill/>
+        </p:spPr>
+        <p:txBody>
+          <a:bodyPr wrap="square">
+            <a:spAutoFit/>
+          </a:bodyPr>
+          <a:lstStyle/>
+          <a:p>
+            <a:pPr algn="l">
+              <a:defRPr sz="1200" b="0" i="0">
+                <a:solidFill>
+                  <a:srgbClr val="E8ECF4"/>
+                </a:solidFill>
+                <a:latin typeface="Arial"/>
+              </a:defRPr>
+            </a:pPr>
+            <a:r>
+              <a:t>Search the PRP for the keyword — it's not there</a:t>
+            </a:r>
+          </a:p>
+        </p:txBody>
+      </p:sp>
+      <p:sp>
+        <p:nvSpPr>
+          <p:cNvPr id="14" name="TextBox 13"/>
+          <p:cNvSpPr txBox="1"/>
+          <p:nvPr/>
+        </p:nvSpPr>
+        <p:spPr>
+          <a:xfrm>
+            <a:off x="6949440" y="2176272"/>
+            <a:ext cx="4754880" cy="633222"/>
+          </a:xfrm>
+          <a:prstGeom prst="rect">
+            <a:avLst/>
+          </a:prstGeom>
+          <a:noFill/>
+        </p:spPr>
+        <p:txBody>
+          <a:bodyPr wrap="square">
+            <a:spAutoFit/>
+          </a:bodyPr>
+          <a:lstStyle/>
+          <a:p>
+            <a:pPr algn="l">
+              <a:defRPr sz="1200" b="0" i="0">
+                <a:solidFill>
+                  <a:srgbClr val="E8ECF4"/>
+                </a:solidFill>
+                <a:latin typeface="Arial"/>
+              </a:defRPr>
+            </a:pPr>
+            <a:r>
+              <a:t>Add it to the Implementation Plan, save, re-run /execute-prp</a:t>
+            </a:r>
+          </a:p>
+        </p:txBody>
+      </p:sp>
+      <p:sp>
+        <p:nvSpPr>
+          <p:cNvPr id="15" name="TextBox 14"/>
+          <p:cNvSpPr txBox="1"/>
+          <p:nvPr/>
+        </p:nvSpPr>
+        <p:spPr>
+          <a:xfrm>
+            <a:off x="548640" y="2900934"/>
+            <a:ext cx="3291840" cy="633222"/>
+          </a:xfrm>
+          <a:prstGeom prst="rect">
+            <a:avLst/>
+          </a:prstGeom>
+          <a:noFill/>
+        </p:spPr>
+        <p:txBody>
+          <a:bodyPr wrap="square">
+            <a:spAutoFit/>
+          </a:bodyPr>
+          <a:lstStyle/>
+          <a:p>
+            <a:pPr algn="l">
+              <a:defRPr sz="1200" b="0" i="0">
+                <a:solidFill>
+                  <a:srgbClr val="E8ECF4"/>
+                </a:solidFill>
+                <a:latin typeface="Arial"/>
+              </a:defRPr>
+            </a:pPr>
+            <a:r>
+              <a:t>Generated command hardcodes values instead of $ARGUMENTS</a:t>
+            </a:r>
+          </a:p>
+        </p:txBody>
+      </p:sp>
+      <p:sp>
+        <p:nvSpPr>
+          <p:cNvPr id="16" name="TextBox 15"/>
+          <p:cNvSpPr txBox="1"/>
+          <p:nvPr/>
+        </p:nvSpPr>
+        <p:spPr>
+          <a:xfrm>
+            <a:off x="3931920" y="2900934"/>
+            <a:ext cx="2926080" cy="633222"/>
+          </a:xfrm>
+          <a:prstGeom prst="rect">
+            <a:avLst/>
+          </a:prstGeom>
+          <a:noFill/>
+        </p:spPr>
+        <p:txBody>
+          <a:bodyPr wrap="square">
+            <a:spAutoFit/>
+          </a:bodyPr>
+          <a:lstStyle/>
+          <a:p>
+            <a:pPr algn="l">
+              <a:defRPr sz="1200" b="0" i="0">
+                <a:solidFill>
+                  <a:srgbClr val="E8ECF4"/>
+                </a:solidFill>
+                <a:latin typeface="Arial"/>
+              </a:defRPr>
+            </a:pPr>
+            <a:r>
+              <a:t>Open the new command file — paths are baked in</a:t>
+            </a:r>
+          </a:p>
+        </p:txBody>
+      </p:sp>
+      <p:sp>
+        <p:nvSpPr>
+          <p:cNvPr id="17" name="TextBox 16"/>
+          <p:cNvSpPr txBox="1"/>
+          <p:nvPr/>
+        </p:nvSpPr>
+        <p:spPr>
+          <a:xfrm>
+            <a:off x="6949440" y="2900934"/>
+            <a:ext cx="4754880" cy="633222"/>
+          </a:xfrm>
+          <a:prstGeom prst="rect">
+            <a:avLst/>
+          </a:prstGeom>
+          <a:noFill/>
+        </p:spPr>
+        <p:txBody>
+          <a:bodyPr wrap="square">
+            <a:spAutoFit/>
+          </a:bodyPr>
+          <a:lstStyle/>
+          <a:p>
+            <a:pPr algn="l">
+              <a:defRPr sz="1200" b="0" i="0">
+                <a:solidFill>
+                  <a:srgbClr val="E8ECF4"/>
+                </a:solidFill>
+                <a:latin typeface="Arial"/>
+              </a:defRPr>
+            </a:pPr>
+            <a:r>
+              <a:t>Edit the command directly, or fix the PRP's pattern reference and re-execute</a:t>
+            </a:r>
+          </a:p>
+        </p:txBody>
+      </p:sp>
+      <p:sp>
+        <p:nvSpPr>
+          <p:cNvPr id="18" name="Rectangle 17"/>
+          <p:cNvSpPr/>
+          <p:nvPr/>
+        </p:nvSpPr>
+        <p:spPr>
+          <a:xfrm>
+            <a:off x="502920" y="3543300"/>
+            <a:ext cx="11247120" cy="678942"/>
+          </a:xfrm>
+          <a:prstGeom prst="rect">
+            <a:avLst/>
+          </a:prstGeom>
+          <a:solidFill>
+            <a:srgbClr val="181D27"/>
+          </a:solidFill>
+          <a:ln>
+            <a:noFill/>
+          </a:ln>
+        </p:spPr>
+        <p:style>
+          <a:lnRef idx="1">
+            <a:schemeClr val="accent1"/>
+          </a:lnRef>
+          <a:fillRef idx="3">
+            <a:schemeClr val="accent1"/>
+          </a:fillRef>
+          <a:effectRef idx="2">
+            <a:schemeClr val="accent1"/>
+          </a:effectRef>
+          <a:fontRef idx="minor">
+            <a:schemeClr val="lt1"/>
+          </a:fontRef>
+        </p:style>
+        <p:txBody>
+          <a:bodyPr rtlCol="0" anchor="ctr"/>
+          <a:lstStyle/>
+          <a:p>
+            <a:pPr algn="ctr"/>
+          </a:p>
+        </p:txBody>
+      </p:sp>
+      <p:sp>
+        <p:nvSpPr>
+          <p:cNvPr id="19" name="TextBox 18"/>
+          <p:cNvSpPr txBox="1"/>
+          <p:nvPr/>
+        </p:nvSpPr>
+        <p:spPr>
+          <a:xfrm>
+            <a:off x="548640" y="3625596"/>
+            <a:ext cx="3291840" cy="633222"/>
+          </a:xfrm>
+          <a:prstGeom prst="rect">
+            <a:avLst/>
+          </a:prstGeom>
+          <a:noFill/>
+        </p:spPr>
+        <p:txBody>
+          <a:bodyPr wrap="square">
+            <a:spAutoFit/>
+          </a:bodyPr>
+          <a:lstStyle/>
+          <a:p>
+            <a:pPr algn="l">
+              <a:defRPr sz="1200" b="0" i="0">
+                <a:solidFill>
+                  <a:srgbClr val="E8ECF4"/>
+                </a:solidFill>
+                <a:latin typeface="Arial"/>
+              </a:defRPr>
+            </a:pPr>
+            <a:r>
+              <a:t>Output doesn't match the schema in CLAUDE.md</a:t>
+            </a:r>
+          </a:p>
+        </p:txBody>
+      </p:sp>
+      <p:sp>
+        <p:nvSpPr>
+          <p:cNvPr id="20" name="TextBox 19"/>
+          <p:cNvSpPr txBox="1"/>
+          <p:nvPr/>
+        </p:nvSpPr>
+        <p:spPr>
+          <a:xfrm>
+            <a:off x="3931920" y="3625596"/>
+            <a:ext cx="2926080" cy="633222"/>
+          </a:xfrm>
+          <a:prstGeom prst="rect">
+            <a:avLst/>
+          </a:prstGeom>
+          <a:noFill/>
+        </p:spPr>
+        <p:txBody>
+          <a:bodyPr wrap="square">
+            <a:spAutoFit/>
+          </a:bodyPr>
+          <a:lstStyle/>
+          <a:p>
+            <a:pPr algn="l">
+              <a:defRPr sz="1200" b="0" i="0">
+                <a:solidFill>
+                  <a:srgbClr val="E8ECF4"/>
+                </a:solidFill>
+                <a:latin typeface="Arial"/>
+              </a:defRPr>
+            </a:pPr>
+            <a:r>
+              <a:t>Run the command — JSON keys wrong, fields missing</a:t>
+            </a:r>
+          </a:p>
+        </p:txBody>
+      </p:sp>
+      <p:sp>
+        <p:nvSpPr>
+          <p:cNvPr id="21" name="TextBox 20"/>
+          <p:cNvSpPr txBox="1"/>
+          <p:nvPr/>
+        </p:nvSpPr>
+        <p:spPr>
+          <a:xfrm>
+            <a:off x="6949440" y="3625596"/>
+            <a:ext cx="4754880" cy="633222"/>
+          </a:xfrm>
+          <a:prstGeom prst="rect">
+            <a:avLst/>
+          </a:prstGeom>
+          <a:noFill/>
+        </p:spPr>
+        <p:txBody>
+          <a:bodyPr wrap="square">
+            <a:spAutoFit/>
+          </a:bodyPr>
+          <a:lstStyle/>
+          <a:p>
+            <a:pPr algn="l">
+              <a:defRPr sz="1200" b="0" i="0">
+                <a:solidFill>
+                  <a:srgbClr val="E8ECF4"/>
+                </a:solidFill>
+                <a:latin typeface="Arial"/>
+              </a:defRPr>
+            </a:pPr>
+            <a:r>
+              <a:t>Tighten the schema rules in CLAUDE.md — every future command benefits</a:t>
+            </a:r>
+          </a:p>
+        </p:txBody>
+      </p:sp>
+      <p:sp>
+        <p:nvSpPr>
+          <p:cNvPr id="22" name="TextBox 21"/>
+          <p:cNvSpPr txBox="1"/>
+          <p:nvPr/>
+        </p:nvSpPr>
+        <p:spPr>
+          <a:xfrm>
+            <a:off x="548640" y="4350257"/>
+            <a:ext cx="3291840" cy="633222"/>
+          </a:xfrm>
+          <a:prstGeom prst="rect">
+            <a:avLst/>
+          </a:prstGeom>
+          <a:noFill/>
+        </p:spPr>
+        <p:txBody>
+          <a:bodyPr wrap="square">
+            <a:spAutoFit/>
+          </a:bodyPr>
+          <a:lstStyle/>
+          <a:p>
+            <a:pPr algn="l">
+              <a:defRPr sz="1200" b="0" i="0">
+                <a:solidFill>
+                  <a:srgbClr val="E8ECF4"/>
+                </a:solidFill>
+                <a:latin typeface="Arial"/>
+              </a:defRPr>
+            </a:pPr>
+            <a:r>
+              <a:t>/execute-prp left files half-done</a:t>
+            </a:r>
+          </a:p>
+        </p:txBody>
+      </p:sp>
+      <p:sp>
+        <p:nvSpPr>
+          <p:cNvPr id="23" name="TextBox 22"/>
+          <p:cNvSpPr txBox="1"/>
+          <p:nvPr/>
+        </p:nvSpPr>
+        <p:spPr>
+          <a:xfrm>
+            <a:off x="3931920" y="4350257"/>
+            <a:ext cx="2926080" cy="633222"/>
+          </a:xfrm>
+          <a:prstGeom prst="rect">
+            <a:avLst/>
+          </a:prstGeom>
+          <a:noFill/>
+        </p:spPr>
+        <p:txBody>
+          <a:bodyPr wrap="square">
+            <a:spAutoFit/>
+          </a:bodyPr>
+          <a:lstStyle/>
+          <a:p>
+            <a:pPr algn="l">
+              <a:defRPr sz="1200" b="0" i="0">
+                <a:solidFill>
+                  <a:srgbClr val="E8ECF4"/>
+                </a:solidFill>
+                <a:latin typeface="Arial"/>
+              </a:defRPr>
+            </a:pPr>
+            <a:r>
+              <a:t>Some command files in .claude/commands/ are missing</a:t>
+            </a:r>
+          </a:p>
+        </p:txBody>
+      </p:sp>
+      <p:sp>
+        <p:nvSpPr>
+          <p:cNvPr id="24" name="TextBox 23"/>
+          <p:cNvSpPr txBox="1"/>
+          <p:nvPr/>
+        </p:nvSpPr>
+        <p:spPr>
+          <a:xfrm>
+            <a:off x="6949440" y="4350257"/>
+            <a:ext cx="4754880" cy="633222"/>
+          </a:xfrm>
+          <a:prstGeom prst="rect">
+            <a:avLst/>
+          </a:prstGeom>
+          <a:noFill/>
+        </p:spPr>
+        <p:txBody>
+          <a:bodyPr wrap="square">
+            <a:spAutoFit/>
+          </a:bodyPr>
+          <a:lstStyle/>
+          <a:p>
+            <a:pPr algn="l">
+              <a:defRPr sz="1200" b="0" i="0">
+                <a:solidFill>
+                  <a:srgbClr val="E8ECF4"/>
+                </a:solidFill>
+                <a:latin typeface="Arial"/>
+              </a:defRPr>
+            </a:pPr>
+            <a:r>
+              <a:t>Re-run /execute-prp on the same PRP — existing files are read and respected</a:t>
+            </a:r>
+          </a:p>
+        </p:txBody>
+      </p:sp>
+      <p:sp>
+        <p:nvSpPr>
+          <p:cNvPr id="25" name="TextBox 24"/>
+          <p:cNvSpPr txBox="1"/>
+          <p:nvPr/>
+        </p:nvSpPr>
+        <p:spPr>
+          <a:xfrm>
+            <a:off x="548640" y="6263640"/>
+            <a:ext cx="10972800" cy="365760"/>
+          </a:xfrm>
+          <a:prstGeom prst="rect">
+            <a:avLst/>
+          </a:prstGeom>
+          <a:noFill/>
+        </p:spPr>
+        <p:txBody>
+          <a:bodyPr wrap="square">
+            <a:spAutoFit/>
+          </a:bodyPr>
+          <a:lstStyle/>
+          <a:p>
+            <a:pPr algn="l">
+              <a:defRPr sz="1400" b="1" i="1">
+                <a:solidFill>
+                  <a:srgbClr val="E8853D"/>
+                </a:solidFill>
+                <a:latin typeface="Arial"/>
+              </a:defRPr>
+            </a:pPr>
+            <a:r>
+              <a:t>Leverage points: PRP and CLAUDE.md. Command files are downstream — fix upstream, regenerate downstream.</a:t>
+            </a:r>
+          </a:p>
+        </p:txBody>
+      </p:sp>
+      <p:sp>
+        <p:nvSpPr>
+          <p:cNvPr id="26" name="TextBox 25"/>
           <p:cNvSpPr txBox="1"/>
           <p:nvPr/>
         </p:nvSpPr>
@@ -6715,7 +7152,7 @@
               </a:defRPr>
             </a:pPr>
             <a:r>
-              <a:t>Composable Slash Commands</a:t>
+              <a:t>The Examples/ Folder</a:t>
             </a:r>
           </a:p>
         </p:txBody>
@@ -6794,7 +7231,7 @@
               </a:defRPr>
             </a:pPr>
             <a:r>
-              <a:t>PIPE</a:t>
+              <a:t>DIR</a:t>
             </a:r>
           </a:p>
         </p:txBody>
@@ -6808,7 +7245,7 @@
         <p:spPr>
           <a:xfrm>
             <a:off x="457200" y="1188720"/>
-            <a:ext cx="11274552" cy="5120640"/>
+            <a:ext cx="11274552" cy="4754880"/>
           </a:xfrm>
           <a:prstGeom prst="roundRect">
             <a:avLst/>
@@ -6982,7 +7419,7 @@
         <p:spPr>
           <a:xfrm>
             <a:off x="731520" y="1920240"/>
-            <a:ext cx="10698480" cy="4343400"/>
+            <a:ext cx="10698480" cy="3977640"/>
           </a:xfrm>
           <a:prstGeom prst="rect">
             <a:avLst/>
@@ -6996,7 +7433,7 @@
           <a:lstStyle/>
           <a:p>
             <a:pPr algn="l">
-              <a:defRPr sz="1200" b="0" i="0">
+              <a:defRPr sz="1300" b="0" i="0">
                 <a:solidFill>
                   <a:srgbClr val="E8ECF4"/>
                 </a:solidFill>
@@ -7004,54 +7441,116 @@
               </a:defRPr>
             </a:pPr>
             <a:r>
-              <a:t>/plan-event "RAG pipelines"</a:t>
+              <a:t>examples/</a:t>
             </a:r>
             <a:br/>
             <a:r>
-              <a:t>    --&gt; outputs events/rag-pipelines.json</a:t>
+              <a:t>  sample-event-plan.json     "Make output look like this"</a:t>
+            </a:r>
+            <a:br/>
+            <a:r>
+              <a:t>  sample-announcement.md     "Match this tone and format"</a:t>
+            </a:r>
+            <a:br/>
+            <a:r>
+              <a:t>  sample-schedule.md         "Follow this structure"</a:t>
             </a:r>
             <a:br/>
             <a:br/>
             <a:r>
-              <a:t>/build-schedule events/rag-pipelines.json</a:t>
-            </a:r>
-            <a:br/>
-            <a:r>
-              <a:t>    --&gt; outputs schedules/rag-pipelines.md + .json</a:t>
+              <a:t>The AI pattern-matches against your examples.</a:t>
             </a:r>
             <a:br/>
             <a:br/>
             <a:r>
-              <a:t>/draft-announcement events/rag-pipelines.json</a:t>
+              <a:t>  - Specific JSON schema      -&gt;  show a sample file</a:t>
             </a:r>
             <a:br/>
             <a:r>
-              <a:t>    --&gt; outputs comms/rag-pipelines-announcement.md</a:t>
+              <a:t>  - Particular email tone     -&gt;  include a real example</a:t>
             </a:r>
             <a:br/>
-            <a:br/>
-            <a:br/>
-            <a:r>
-              <a:t>Each command reads structured data from the previous one.</a:t>
-            </a:r>
-            <a:br/>
-            <a:r>
-              <a:t>  - Predictable format          -&gt;  reliable piping</a:t>
-            </a:r>
-            <a:br/>
-            <a:r>
-              <a:t>  - Schema in CLAUDE.md         -&gt;  every command knows the contract</a:t>
-            </a:r>
-            <a:br/>
-            <a:r>
-              <a:t>  - Structured beats freeform   -&gt;  for agent-to-agent communication</a:t>
-            </a:r>
-          </a:p>
-        </p:txBody>
-      </p:sp>
-      <p:sp>
-        <p:nvSpPr>
-          <p:cNvPr id="10" name="Rectangle 9"/>
+            <a:r>
+              <a:t>  - Consistent formatting     -&gt;  provide a template</a:t>
+            </a:r>
+          </a:p>
+        </p:txBody>
+      </p:sp>
+      <p:sp>
+        <p:nvSpPr>
+          <p:cNvPr id="10" name="TextBox 9"/>
+          <p:cNvSpPr txBox="1"/>
+          <p:nvPr/>
+        </p:nvSpPr>
+        <p:spPr>
+          <a:xfrm>
+            <a:off x="457200" y="6126480"/>
+            <a:ext cx="11274552" cy="457200"/>
+          </a:xfrm>
+          <a:prstGeom prst="rect">
+            <a:avLst/>
+          </a:prstGeom>
+          <a:noFill/>
+        </p:spPr>
+        <p:txBody>
+          <a:bodyPr wrap="square">
+            <a:spAutoFit/>
+          </a:bodyPr>
+          <a:lstStyle/>
+          <a:p>
+            <a:pPr algn="ctr">
+              <a:defRPr sz="1600" b="1" i="0">
+                <a:solidFill>
+                  <a:srgbClr val="E8ECF4"/>
+                </a:solidFill>
+                <a:latin typeface="Arial"/>
+              </a:defRPr>
+            </a:pPr>
+            <a:r>
+              <a:t>Show it. Don't describe it.</a:t>
+            </a:r>
+          </a:p>
+        </p:txBody>
+      </p:sp>
+      <p:sp>
+        <p:nvSpPr>
+          <p:cNvPr id="11" name="TextBox 10"/>
+          <p:cNvSpPr txBox="1"/>
+          <p:nvPr/>
+        </p:nvSpPr>
+        <p:spPr>
+          <a:xfrm>
+            <a:off x="457200" y="6537960"/>
+            <a:ext cx="11274552" cy="548640"/>
+          </a:xfrm>
+          <a:prstGeom prst="rect">
+            <a:avLst/>
+          </a:prstGeom>
+          <a:noFill/>
+        </p:spPr>
+        <p:txBody>
+          <a:bodyPr wrap="square">
+            <a:spAutoFit/>
+          </a:bodyPr>
+          <a:lstStyle/>
+          <a:p>
+            <a:pPr algn="ctr">
+              <a:defRPr sz="1300" b="0" i="1">
+                <a:solidFill>
+                  <a:srgbClr val="9CA3B4"/>
+                </a:solidFill>
+                <a:latin typeface="Arial"/>
+              </a:defRPr>
+            </a:pPr>
+            <a:r>
+              <a:t>The design slop sites all look the same because the AI had no examples to differentiate against.</a:t>
+            </a:r>
+          </a:p>
+        </p:txBody>
+      </p:sp>
+      <p:sp>
+        <p:nvSpPr>
+          <p:cNvPr id="12" name="Rectangle 11"/>
           <p:cNvSpPr/>
           <p:nvPr/>
         </p:nvSpPr>
@@ -7094,7 +7593,7 @@
       </p:sp>
       <p:sp>
         <p:nvSpPr>
-          <p:cNvPr id="11" name="TextBox 10"/>
+          <p:cNvPr id="13" name="TextBox 12"/>
           <p:cNvSpPr txBox="1"/>
           <p:nvPr/>
         </p:nvSpPr>
@@ -7185,7 +7684,7 @@
               </a:defRPr>
             </a:pPr>
             <a:r>
-              <a:t>$ARGUMENTS in Slash Commands</a:t>
+              <a:t>Composable Slash Commands</a:t>
             </a:r>
           </a:p>
         </p:txBody>
@@ -7264,7 +7763,7 @@
               </a:defRPr>
             </a:pPr>
             <a:r>
-              <a:t>MD</a:t>
+              <a:t>PIPE</a:t>
             </a:r>
           </a:p>
         </p:txBody>
@@ -7278,7 +7777,7 @@
         <p:spPr>
           <a:xfrm>
             <a:off x="457200" y="1188720"/>
-            <a:ext cx="11274552" cy="4572000"/>
+            <a:ext cx="11274552" cy="5120640"/>
           </a:xfrm>
           <a:prstGeom prst="roundRect">
             <a:avLst/>
@@ -7452,7 +7951,7 @@
         <p:spPr>
           <a:xfrm>
             <a:off x="731520" y="1920240"/>
-            <a:ext cx="10698480" cy="3794760"/>
+            <a:ext cx="10698480" cy="4343400"/>
           </a:xfrm>
           <a:prstGeom prst="rect">
             <a:avLst/>
@@ -7466,7 +7965,7 @@
           <a:lstStyle/>
           <a:p>
             <a:pPr algn="l">
-              <a:defRPr sz="1300" b="0" i="0">
+              <a:defRPr sz="1200" b="0" i="0">
                 <a:solidFill>
                   <a:srgbClr val="E8ECF4"/>
                 </a:solidFill>
@@ -7474,128 +7973,54 @@
               </a:defRPr>
             </a:pPr>
             <a:r>
-              <a:t>---</a:t>
+              <a:t>/plan-event "RAG pipelines"</a:t>
             </a:r>
             <a:br/>
             <a:r>
-              <a:t>name: build-schedule</a:t>
-            </a:r>
-            <a:br/>
-            <a:r>
-              <a:t>description: Build a schedule from an event plan</a:t>
-            </a:r>
-            <a:br/>
-            <a:r>
-              <a:t>argument-hint: [event-plan.json]</a:t>
-            </a:r>
-            <a:br/>
-            <a:r>
-              <a:t>allowed-tools: Read, Write</a:t>
-            </a:r>
-            <a:br/>
-            <a:r>
-              <a:t>---</a:t>
+              <a:t>    --&gt; outputs events/rag-pipelines.json</a:t>
             </a:r>
             <a:br/>
             <a:br/>
             <a:r>
-              <a:t>Build a schedule for the event plan at: $ARGUMENTS</a:t>
+              <a:t>/build-schedule events/rag-pipelines.json</a:t>
+            </a:r>
+            <a:br/>
+            <a:r>
+              <a:t>    --&gt; outputs schedules/rag-pipelines.md + .json</a:t>
             </a:r>
             <a:br/>
             <a:br/>
             <a:r>
-              <a:t>## Steps:</a:t>
+              <a:t>/draft-announcement events/rag-pipelines.json</a:t>
             </a:r>
             <a:br/>
             <a:r>
-              <a:t>1. Read $ARGUMENTS and data/speakers.json</a:t>
+              <a:t>    --&gt; outputs comms/rag-pipelines-announcement.md</a:t>
             </a:r>
             <a:br/>
-            <a:r>
-              <a:t>2. Fit talks into time slots, breaks every 90 min</a:t>
-            </a:r>
             <a:br/>
-            <a:r>
-              <a:t>3. Output markdown + JSON to schedules/</a:t>
-            </a:r>
-          </a:p>
-        </p:txBody>
-      </p:sp>
-      <p:sp>
-        <p:nvSpPr>
-          <p:cNvPr id="10" name="TextBox 9"/>
-          <p:cNvSpPr txBox="1"/>
-          <p:nvPr/>
-        </p:nvSpPr>
-        <p:spPr>
-          <a:xfrm>
-            <a:off x="457200" y="5943600"/>
-            <a:ext cx="11274552" cy="457200"/>
-          </a:xfrm>
-          <a:prstGeom prst="rect">
-            <a:avLst/>
-          </a:prstGeom>
-          <a:noFill/>
-        </p:spPr>
-        <p:txBody>
-          <a:bodyPr wrap="square">
-            <a:spAutoFit/>
-          </a:bodyPr>
-          <a:lstStyle/>
-          <a:p>
-            <a:pPr algn="ctr">
-              <a:defRPr sz="1600" b="1" i="0">
-                <a:solidFill>
-                  <a:srgbClr val="E8ECF4"/>
-                </a:solidFill>
-                <a:latin typeface="Arial"/>
-              </a:defRPr>
-            </a:pPr>
-            <a:r>
-              <a:t>/build-schedule events/rag-pipelines.json  →  $ARGUMENTS becomes the file path</a:t>
-            </a:r>
-          </a:p>
-        </p:txBody>
-      </p:sp>
-      <p:sp>
-        <p:nvSpPr>
-          <p:cNvPr id="11" name="TextBox 10"/>
-          <p:cNvSpPr txBox="1"/>
-          <p:nvPr/>
-        </p:nvSpPr>
-        <p:spPr>
-          <a:xfrm>
-            <a:off x="457200" y="6355080"/>
-            <a:ext cx="11274552" cy="548640"/>
-          </a:xfrm>
-          <a:prstGeom prst="rect">
-            <a:avLst/>
-          </a:prstGeom>
-          <a:noFill/>
-        </p:spPr>
-        <p:txBody>
-          <a:bodyPr wrap="square">
-            <a:spAutoFit/>
-          </a:bodyPr>
-          <a:lstStyle/>
-          <a:p>
-            <a:pPr algn="ctr">
-              <a:defRPr sz="1300" b="0" i="1">
-                <a:solidFill>
-                  <a:srgbClr val="9CA3B4"/>
-                </a:solidFill>
-                <a:latin typeface="Arial"/>
-              </a:defRPr>
-            </a:pPr>
-            <a:r>
-              <a:t>YAML frontmatter is the current convention. Plain markdown still works. Skills (.claude/skills/&lt;name&gt;/SKILL.md) — Session 3.</a:t>
-            </a:r>
-          </a:p>
-        </p:txBody>
-      </p:sp>
-      <p:sp>
-        <p:nvSpPr>
-          <p:cNvPr id="12" name="Rectangle 11"/>
+            <a:br/>
+            <a:r>
+              <a:t>Each command reads structured data from the previous one.</a:t>
+            </a:r>
+            <a:br/>
+            <a:r>
+              <a:t>  - Predictable format          -&gt;  reliable piping</a:t>
+            </a:r>
+            <a:br/>
+            <a:r>
+              <a:t>  - Schema in CLAUDE.md         -&gt;  every command knows the contract</a:t>
+            </a:r>
+            <a:br/>
+            <a:r>
+              <a:t>  - Structured beats freeform   -&gt;  for agent-to-agent communication</a:t>
+            </a:r>
+          </a:p>
+        </p:txBody>
+      </p:sp>
+      <p:sp>
+        <p:nvSpPr>
+          <p:cNvPr id="10" name="Rectangle 9"/>
           <p:cNvSpPr/>
           <p:nvPr/>
         </p:nvSpPr>
@@ -7638,7 +8063,7 @@
       </p:sp>
       <p:sp>
         <p:nvSpPr>
-          <p:cNvPr id="13" name="TextBox 12"/>
+          <p:cNvPr id="11" name="TextBox 10"/>
           <p:cNvSpPr txBox="1"/>
           <p:nvPr/>
         </p:nvSpPr>
@@ -7700,16 +8125,52 @@
       <p:grpSpPr/>
       <p:sp>
         <p:nvSpPr>
-          <p:cNvPr id="2" name="Rectangle 1"/>
+          <p:cNvPr id="2" name="TextBox 1"/>
+          <p:cNvSpPr txBox="1"/>
+          <p:nvPr/>
+        </p:nvSpPr>
+        <p:spPr>
+          <a:xfrm>
+            <a:off x="457200" y="320040"/>
+            <a:ext cx="9144000" cy="731520"/>
+          </a:xfrm>
+          <a:prstGeom prst="rect">
+            <a:avLst/>
+          </a:prstGeom>
+          <a:noFill/>
+        </p:spPr>
+        <p:txBody>
+          <a:bodyPr wrap="square">
+            <a:spAutoFit/>
+          </a:bodyPr>
+          <a:lstStyle/>
+          <a:p>
+            <a:pPr algn="l">
+              <a:defRPr sz="2800" b="1" i="0">
+                <a:solidFill>
+                  <a:srgbClr val="E8ECF4"/>
+                </a:solidFill>
+                <a:latin typeface="Arial"/>
+              </a:defRPr>
+            </a:pPr>
+            <a:r>
+              <a:t>$ARGUMENTS in Slash Commands</a:t>
+            </a:r>
+          </a:p>
+        </p:txBody>
+      </p:sp>
+      <p:sp>
+        <p:nvSpPr>
+          <p:cNvPr id="3" name="Rounded Rectangle 2"/>
           <p:cNvSpPr/>
           <p:nvPr/>
         </p:nvSpPr>
         <p:spPr>
           <a:xfrm>
-            <a:off x="0" y="0"/>
-            <a:ext cx="12191695" cy="109728"/>
-          </a:xfrm>
-          <a:prstGeom prst="rect">
+            <a:off x="10515600" y="960120"/>
+            <a:ext cx="1188720" cy="365760"/>
+          </a:xfrm>
+          <a:prstGeom prst="roundRect">
             <a:avLst/>
           </a:prstGeom>
           <a:solidFill>
@@ -7743,14 +8204,14 @@
       </p:sp>
       <p:sp>
         <p:nvSpPr>
-          <p:cNvPr id="3" name="TextBox 2"/>
+          <p:cNvPr id="4" name="TextBox 3"/>
           <p:cNvSpPr txBox="1"/>
           <p:nvPr/>
         </p:nvSpPr>
         <p:spPr>
           <a:xfrm>
-            <a:off x="457200" y="320040"/>
-            <a:ext cx="10972800" cy="777240"/>
+            <a:off x="10515600" y="987552"/>
+            <a:ext cx="1188720" cy="365760"/>
           </a:xfrm>
           <a:prstGeom prst="rect">
             <a:avLst/>
@@ -7763,39 +8224,41 @@
           </a:bodyPr>
           <a:lstStyle/>
           <a:p>
-            <a:pPr algn="l">
-              <a:defRPr sz="2800" b="1" i="0">
-                <a:solidFill>
-                  <a:srgbClr val="E8ECF4"/>
-                </a:solidFill>
-                <a:latin typeface="Arial"/>
+            <a:pPr algn="ctr">
+              <a:defRPr sz="1200" b="1" i="0">
+                <a:solidFill>
+                  <a:srgbClr val="0A0D12"/>
+                </a:solidFill>
+                <a:latin typeface="Courier New"/>
               </a:defRPr>
             </a:pPr>
             <a:r>
-              <a:t>Tips &amp; Gotchas</a:t>
-            </a:r>
-          </a:p>
-        </p:txBody>
-      </p:sp>
-      <p:sp>
-        <p:nvSpPr>
-          <p:cNvPr id="4" name="Rectangle 3"/>
+              <a:t>MD</a:t>
+            </a:r>
+          </a:p>
+        </p:txBody>
+      </p:sp>
+      <p:sp>
+        <p:nvSpPr>
+          <p:cNvPr id="5" name="Rounded Rectangle 4"/>
           <p:cNvSpPr/>
           <p:nvPr/>
         </p:nvSpPr>
         <p:spPr>
           <a:xfrm>
-            <a:off x="5989320" y="1280160"/>
-            <a:ext cx="210312" cy="4937760"/>
-          </a:xfrm>
-          <a:prstGeom prst="rect">
+            <a:off x="457200" y="1188720"/>
+            <a:ext cx="11274552" cy="4572000"/>
+          </a:xfrm>
+          <a:prstGeom prst="roundRect">
             <a:avLst/>
           </a:prstGeom>
           <a:solidFill>
-            <a:srgbClr val="313244"/>
+            <a:srgbClr val="0A0D12"/>
           </a:solidFill>
           <a:ln>
-            <a:noFill/>
+            <a:solidFill>
+              <a:srgbClr val="313244"/>
+            </a:solidFill>
           </a:ln>
         </p:spPr>
         <p:style>
@@ -7822,59 +8285,16 @@
       </p:sp>
       <p:sp>
         <p:nvSpPr>
-          <p:cNvPr id="5" name="Rectangle 4"/>
+          <p:cNvPr id="6" name="Oval 5"/>
           <p:cNvSpPr/>
           <p:nvPr/>
         </p:nvSpPr>
         <p:spPr>
           <a:xfrm>
-            <a:off x="6062472" y="1280160"/>
-            <a:ext cx="64008" cy="4937760"/>
-          </a:xfrm>
-          <a:prstGeom prst="rect">
-            <a:avLst/>
-          </a:prstGeom>
-          <a:solidFill>
-            <a:srgbClr val="E8853D"/>
-          </a:solidFill>
-          <a:ln>
-            <a:noFill/>
-          </a:ln>
-        </p:spPr>
-        <p:style>
-          <a:lnRef idx="1">
-            <a:schemeClr val="accent1"/>
-          </a:lnRef>
-          <a:fillRef idx="3">
-            <a:schemeClr val="accent1"/>
-          </a:fillRef>
-          <a:effectRef idx="2">
-            <a:schemeClr val="accent1"/>
-          </a:effectRef>
-          <a:fontRef idx="minor">
-            <a:schemeClr val="lt1"/>
-          </a:fontRef>
-        </p:style>
-        <p:txBody>
-          <a:bodyPr rtlCol="0" anchor="ctr"/>
-          <a:lstStyle/>
-          <a:p>
-            <a:pPr algn="ctr"/>
-          </a:p>
-        </p:txBody>
-      </p:sp>
-      <p:sp>
-        <p:nvSpPr>
-          <p:cNvPr id="6" name="Rectangle 5"/>
-          <p:cNvSpPr/>
-          <p:nvPr/>
-        </p:nvSpPr>
-        <p:spPr>
-          <a:xfrm>
-            <a:off x="457200" y="1417320"/>
-            <a:ext cx="137160" cy="457200"/>
-          </a:xfrm>
-          <a:prstGeom prst="rect">
+            <a:off x="731520" y="1417320"/>
+            <a:ext cx="164592" cy="164592"/>
+          </a:xfrm>
+          <a:prstGeom prst="ellipse">
             <a:avLst/>
           </a:prstGeom>
           <a:solidFill>
@@ -7908,56 +8328,20 @@
       </p:sp>
       <p:sp>
         <p:nvSpPr>
-          <p:cNvPr id="7" name="TextBox 6"/>
-          <p:cNvSpPr txBox="1"/>
-          <p:nvPr/>
-        </p:nvSpPr>
-        <p:spPr>
-          <a:xfrm>
-            <a:off x="777240" y="1371600"/>
-            <a:ext cx="5029200" cy="502920"/>
-          </a:xfrm>
-          <a:prstGeom prst="rect">
-            <a:avLst/>
-          </a:prstGeom>
-          <a:noFill/>
-        </p:spPr>
-        <p:txBody>
-          <a:bodyPr wrap="square">
-            <a:spAutoFit/>
-          </a:bodyPr>
-          <a:lstStyle/>
-          <a:p>
-            <a:pPr algn="l">
-              <a:defRPr sz="2200" b="1" i="0">
-                <a:solidFill>
-                  <a:srgbClr val="F38BA8"/>
-                </a:solidFill>
-                <a:latin typeface="Arial"/>
-              </a:defRPr>
-            </a:pPr>
-            <a:r>
-              <a:t>Don't</a:t>
-            </a:r>
-          </a:p>
-        </p:txBody>
-      </p:sp>
-      <p:sp>
-        <p:nvSpPr>
-          <p:cNvPr id="8" name="Oval 7"/>
+          <p:cNvPr id="7" name="Oval 6"/>
           <p:cNvSpPr/>
           <p:nvPr/>
         </p:nvSpPr>
         <p:spPr>
           <a:xfrm>
-            <a:off x="457200" y="2240279"/>
-            <a:ext cx="91440" cy="91440"/>
+            <a:off x="1051560" y="1417320"/>
+            <a:ext cx="164592" cy="164592"/>
           </a:xfrm>
           <a:prstGeom prst="ellipse">
             <a:avLst/>
           </a:prstGeom>
           <a:solidFill>
-            <a:srgbClr val="F38BA8"/>
+            <a:srgbClr val="F9E2AF"/>
           </a:solidFill>
           <a:ln>
             <a:noFill/>
@@ -7987,56 +8371,20 @@
       </p:sp>
       <p:sp>
         <p:nvSpPr>
-          <p:cNvPr id="9" name="TextBox 8"/>
-          <p:cNvSpPr txBox="1"/>
-          <p:nvPr/>
-        </p:nvSpPr>
-        <p:spPr>
-          <a:xfrm>
-            <a:off x="777240" y="2103120"/>
-            <a:ext cx="5029200" cy="777240"/>
-          </a:xfrm>
-          <a:prstGeom prst="rect">
-            <a:avLst/>
-          </a:prstGeom>
-          <a:noFill/>
-        </p:spPr>
-        <p:txBody>
-          <a:bodyPr wrap="square">
-            <a:spAutoFit/>
-          </a:bodyPr>
-          <a:lstStyle/>
-          <a:p>
-            <a:pPr algn="l">
-              <a:defRPr sz="1600" b="0" i="0">
-                <a:solidFill>
-                  <a:srgbClr val="E8ECF4"/>
-                </a:solidFill>
-                <a:latin typeface="Arial"/>
-              </a:defRPr>
-            </a:pPr>
-            <a:r>
-              <a:t>Skip INITIAL.md and go straight to coding</a:t>
-            </a:r>
-          </a:p>
-        </p:txBody>
-      </p:sp>
-      <p:sp>
-        <p:nvSpPr>
-          <p:cNvPr id="10" name="Oval 9"/>
+          <p:cNvPr id="8" name="Oval 7"/>
           <p:cNvSpPr/>
           <p:nvPr/>
         </p:nvSpPr>
         <p:spPr>
           <a:xfrm>
-            <a:off x="457200" y="3017520"/>
-            <a:ext cx="91440" cy="91440"/>
+            <a:off x="1371600" y="1417320"/>
+            <a:ext cx="164592" cy="164592"/>
           </a:xfrm>
           <a:prstGeom prst="ellipse">
             <a:avLst/>
           </a:prstGeom>
           <a:solidFill>
-            <a:srgbClr val="F38BA8"/>
+            <a:srgbClr val="A6E3A1"/>
           </a:solidFill>
           <a:ln>
             <a:noFill/>
@@ -8066,14 +8414,128 @@
       </p:sp>
       <p:sp>
         <p:nvSpPr>
+          <p:cNvPr id="9" name="TextBox 8"/>
+          <p:cNvSpPr txBox="1"/>
+          <p:nvPr/>
+        </p:nvSpPr>
+        <p:spPr>
+          <a:xfrm>
+            <a:off x="731520" y="1920240"/>
+            <a:ext cx="10698480" cy="3794760"/>
+          </a:xfrm>
+          <a:prstGeom prst="rect">
+            <a:avLst/>
+          </a:prstGeom>
+          <a:noFill/>
+        </p:spPr>
+        <p:txBody>
+          <a:bodyPr wrap="none">
+            <a:spAutoFit/>
+          </a:bodyPr>
+          <a:lstStyle/>
+          <a:p>
+            <a:pPr algn="l">
+              <a:defRPr sz="1300" b="0" i="0">
+                <a:solidFill>
+                  <a:srgbClr val="E8ECF4"/>
+                </a:solidFill>
+                <a:latin typeface="Courier New"/>
+              </a:defRPr>
+            </a:pPr>
+            <a:r>
+              <a:t>---</a:t>
+            </a:r>
+            <a:br/>
+            <a:r>
+              <a:t>name: build-schedule</a:t>
+            </a:r>
+            <a:br/>
+            <a:r>
+              <a:t>description: Build a schedule from an event plan</a:t>
+            </a:r>
+            <a:br/>
+            <a:r>
+              <a:t>argument-hint: [event-plan.json]</a:t>
+            </a:r>
+            <a:br/>
+            <a:r>
+              <a:t>allowed-tools: Read, Write</a:t>
+            </a:r>
+            <a:br/>
+            <a:r>
+              <a:t>---</a:t>
+            </a:r>
+            <a:br/>
+            <a:br/>
+            <a:r>
+              <a:t>Build a schedule for the event plan at: $ARGUMENTS</a:t>
+            </a:r>
+            <a:br/>
+            <a:br/>
+            <a:r>
+              <a:t>## Steps:</a:t>
+            </a:r>
+            <a:br/>
+            <a:r>
+              <a:t>1. Read $ARGUMENTS and data/speakers.json</a:t>
+            </a:r>
+            <a:br/>
+            <a:r>
+              <a:t>2. Fit talks into time slots, breaks every 90 min</a:t>
+            </a:r>
+            <a:br/>
+            <a:r>
+              <a:t>3. Output markdown + JSON to schedules/</a:t>
+            </a:r>
+          </a:p>
+        </p:txBody>
+      </p:sp>
+      <p:sp>
+        <p:nvSpPr>
+          <p:cNvPr id="10" name="TextBox 9"/>
+          <p:cNvSpPr txBox="1"/>
+          <p:nvPr/>
+        </p:nvSpPr>
+        <p:spPr>
+          <a:xfrm>
+            <a:off x="457200" y="5943600"/>
+            <a:ext cx="11274552" cy="457200"/>
+          </a:xfrm>
+          <a:prstGeom prst="rect">
+            <a:avLst/>
+          </a:prstGeom>
+          <a:noFill/>
+        </p:spPr>
+        <p:txBody>
+          <a:bodyPr wrap="square">
+            <a:spAutoFit/>
+          </a:bodyPr>
+          <a:lstStyle/>
+          <a:p>
+            <a:pPr algn="ctr">
+              <a:defRPr sz="1600" b="1" i="0">
+                <a:solidFill>
+                  <a:srgbClr val="E8ECF4"/>
+                </a:solidFill>
+                <a:latin typeface="Arial"/>
+              </a:defRPr>
+            </a:pPr>
+            <a:r>
+              <a:t>/build-schedule events/rag-pipelines.json  →  $ARGUMENTS becomes the file path</a:t>
+            </a:r>
+          </a:p>
+        </p:txBody>
+      </p:sp>
+      <p:sp>
+        <p:nvSpPr>
           <p:cNvPr id="11" name="TextBox 10"/>
           <p:cNvSpPr txBox="1"/>
           <p:nvPr/>
         </p:nvSpPr>
         <p:spPr>
           <a:xfrm>
-            <a:off x="777240" y="2880360"/>
-            <a:ext cx="5029200" cy="777240"/>
+            <a:off x="457200" y="6355080"/>
+            <a:ext cx="11274552" cy="548640"/>
           </a:xfrm>
           <a:prstGeom prst="rect">
             <a:avLst/>
@@ -8086,36 +8548,36 @@
           </a:bodyPr>
           <a:lstStyle/>
           <a:p>
-            <a:pPr algn="l">
-              <a:defRPr sz="1600" b="0" i="0">
-                <a:solidFill>
-                  <a:srgbClr val="E8ECF4"/>
+            <a:pPr algn="ctr">
+              <a:defRPr sz="1300" b="0" i="1">
+                <a:solidFill>
+                  <a:srgbClr val="9CA3B4"/>
                 </a:solidFill>
                 <a:latin typeface="Arial"/>
               </a:defRPr>
             </a:pPr>
             <a:r>
-              <a:t>Write vague EXAMPLES sections</a:t>
-            </a:r>
-          </a:p>
-        </p:txBody>
-      </p:sp>
-      <p:sp>
-        <p:nvSpPr>
-          <p:cNvPr id="12" name="Oval 11"/>
+              <a:t>YAML frontmatter is the current convention. Plain markdown still works. Skills (.claude/skills/&lt;name&gt;/SKILL.md) — Session 3.</a:t>
+            </a:r>
+          </a:p>
+        </p:txBody>
+      </p:sp>
+      <p:sp>
+        <p:nvSpPr>
+          <p:cNvPr id="12" name="Rectangle 11"/>
           <p:cNvSpPr/>
           <p:nvPr/>
         </p:nvSpPr>
         <p:spPr>
           <a:xfrm>
-            <a:off x="457200" y="3794760"/>
-            <a:ext cx="91440" cy="91440"/>
-          </a:xfrm>
-          <a:prstGeom prst="ellipse">
+            <a:off x="0" y="6720840"/>
+            <a:ext cx="12191695" cy="137160"/>
+          </a:xfrm>
+          <a:prstGeom prst="rect">
             <a:avLst/>
           </a:prstGeom>
           <a:solidFill>
-            <a:srgbClr val="F38BA8"/>
+            <a:srgbClr val="5B9CF5"/>
           </a:solidFill>
           <a:ln>
             <a:noFill/>
@@ -8146,394 +8608,6 @@
       <p:sp>
         <p:nvSpPr>
           <p:cNvPr id="13" name="TextBox 12"/>
-          <p:cNvSpPr txBox="1"/>
-          <p:nvPr/>
-        </p:nvSpPr>
-        <p:spPr>
-          <a:xfrm>
-            <a:off x="777240" y="3657600"/>
-            <a:ext cx="5029200" cy="777240"/>
-          </a:xfrm>
-          <a:prstGeom prst="rect">
-            <a:avLst/>
-          </a:prstGeom>
-          <a:noFill/>
-        </p:spPr>
-        <p:txBody>
-          <a:bodyPr wrap="square">
-            <a:spAutoFit/>
-          </a:bodyPr>
-          <a:lstStyle/>
-          <a:p>
-            <a:pPr algn="l">
-              <a:defRPr sz="1600" b="0" i="0">
-                <a:solidFill>
-                  <a:srgbClr val="E8ECF4"/>
-                </a:solidFill>
-                <a:latin typeface="Arial"/>
-              </a:defRPr>
-            </a:pPr>
-            <a:r>
-              <a:t>Expect perfection on the first PRP</a:t>
-            </a:r>
-          </a:p>
-        </p:txBody>
-      </p:sp>
-      <p:sp>
-        <p:nvSpPr>
-          <p:cNvPr id="14" name="Rectangle 13"/>
-          <p:cNvSpPr/>
-          <p:nvPr/>
-        </p:nvSpPr>
-        <p:spPr>
-          <a:xfrm>
-            <a:off x="6336792" y="1417320"/>
-            <a:ext cx="137160" cy="457200"/>
-          </a:xfrm>
-          <a:prstGeom prst="rect">
-            <a:avLst/>
-          </a:prstGeom>
-          <a:solidFill>
-            <a:srgbClr val="56C495"/>
-          </a:solidFill>
-          <a:ln>
-            <a:noFill/>
-          </a:ln>
-        </p:spPr>
-        <p:style>
-          <a:lnRef idx="1">
-            <a:schemeClr val="accent1"/>
-          </a:lnRef>
-          <a:fillRef idx="3">
-            <a:schemeClr val="accent1"/>
-          </a:fillRef>
-          <a:effectRef idx="2">
-            <a:schemeClr val="accent1"/>
-          </a:effectRef>
-          <a:fontRef idx="minor">
-            <a:schemeClr val="lt1"/>
-          </a:fontRef>
-        </p:style>
-        <p:txBody>
-          <a:bodyPr rtlCol="0" anchor="ctr"/>
-          <a:lstStyle/>
-          <a:p>
-            <a:pPr algn="ctr"/>
-          </a:p>
-        </p:txBody>
-      </p:sp>
-      <p:sp>
-        <p:nvSpPr>
-          <p:cNvPr id="15" name="TextBox 14"/>
-          <p:cNvSpPr txBox="1"/>
-          <p:nvPr/>
-        </p:nvSpPr>
-        <p:spPr>
-          <a:xfrm>
-            <a:off x="6656832" y="1371600"/>
-            <a:ext cx="5029200" cy="502920"/>
-          </a:xfrm>
-          <a:prstGeom prst="rect">
-            <a:avLst/>
-          </a:prstGeom>
-          <a:noFill/>
-        </p:spPr>
-        <p:txBody>
-          <a:bodyPr wrap="square">
-            <a:spAutoFit/>
-          </a:bodyPr>
-          <a:lstStyle/>
-          <a:p>
-            <a:pPr algn="l">
-              <a:defRPr sz="2200" b="1" i="0">
-                <a:solidFill>
-                  <a:srgbClr val="56C495"/>
-                </a:solidFill>
-                <a:latin typeface="Arial"/>
-              </a:defRPr>
-            </a:pPr>
-            <a:r>
-              <a:t>Do</a:t>
-            </a:r>
-          </a:p>
-        </p:txBody>
-      </p:sp>
-      <p:sp>
-        <p:nvSpPr>
-          <p:cNvPr id="16" name="Oval 15"/>
-          <p:cNvSpPr/>
-          <p:nvPr/>
-        </p:nvSpPr>
-        <p:spPr>
-          <a:xfrm>
-            <a:off x="6336792" y="2240279"/>
-            <a:ext cx="91440" cy="91440"/>
-          </a:xfrm>
-          <a:prstGeom prst="ellipse">
-            <a:avLst/>
-          </a:prstGeom>
-          <a:solidFill>
-            <a:srgbClr val="56C495"/>
-          </a:solidFill>
-          <a:ln>
-            <a:noFill/>
-          </a:ln>
-        </p:spPr>
-        <p:style>
-          <a:lnRef idx="1">
-            <a:schemeClr val="accent1"/>
-          </a:lnRef>
-          <a:fillRef idx="3">
-            <a:schemeClr val="accent1"/>
-          </a:fillRef>
-          <a:effectRef idx="2">
-            <a:schemeClr val="accent1"/>
-          </a:effectRef>
-          <a:fontRef idx="minor">
-            <a:schemeClr val="lt1"/>
-          </a:fontRef>
-        </p:style>
-        <p:txBody>
-          <a:bodyPr rtlCol="0" anchor="ctr"/>
-          <a:lstStyle/>
-          <a:p>
-            <a:pPr algn="ctr"/>
-          </a:p>
-        </p:txBody>
-      </p:sp>
-      <p:sp>
-        <p:nvSpPr>
-          <p:cNvPr id="17" name="TextBox 16"/>
-          <p:cNvSpPr txBox="1"/>
-          <p:nvPr/>
-        </p:nvSpPr>
-        <p:spPr>
-          <a:xfrm>
-            <a:off x="6656832" y="2103120"/>
-            <a:ext cx="5029200" cy="777240"/>
-          </a:xfrm>
-          <a:prstGeom prst="rect">
-            <a:avLst/>
-          </a:prstGeom>
-          <a:noFill/>
-        </p:spPr>
-        <p:txBody>
-          <a:bodyPr wrap="square">
-            <a:spAutoFit/>
-          </a:bodyPr>
-          <a:lstStyle/>
-          <a:p>
-            <a:pPr algn="l">
-              <a:defRPr sz="1600" b="0" i="0">
-                <a:solidFill>
-                  <a:srgbClr val="E8ECF4"/>
-                </a:solidFill>
-                <a:latin typeface="Arial"/>
-              </a:defRPr>
-            </a:pPr>
-            <a:r>
-              <a:t>Review the PRP before executing</a:t>
-            </a:r>
-          </a:p>
-        </p:txBody>
-      </p:sp>
-      <p:sp>
-        <p:nvSpPr>
-          <p:cNvPr id="18" name="Oval 17"/>
-          <p:cNvSpPr/>
-          <p:nvPr/>
-        </p:nvSpPr>
-        <p:spPr>
-          <a:xfrm>
-            <a:off x="6336792" y="3017520"/>
-            <a:ext cx="91440" cy="91440"/>
-          </a:xfrm>
-          <a:prstGeom prst="ellipse">
-            <a:avLst/>
-          </a:prstGeom>
-          <a:solidFill>
-            <a:srgbClr val="56C495"/>
-          </a:solidFill>
-          <a:ln>
-            <a:noFill/>
-          </a:ln>
-        </p:spPr>
-        <p:style>
-          <a:lnRef idx="1">
-            <a:schemeClr val="accent1"/>
-          </a:lnRef>
-          <a:fillRef idx="3">
-            <a:schemeClr val="accent1"/>
-          </a:fillRef>
-          <a:effectRef idx="2">
-            <a:schemeClr val="accent1"/>
-          </a:effectRef>
-          <a:fontRef idx="minor">
-            <a:schemeClr val="lt1"/>
-          </a:fontRef>
-        </p:style>
-        <p:txBody>
-          <a:bodyPr rtlCol="0" anchor="ctr"/>
-          <a:lstStyle/>
-          <a:p>
-            <a:pPr algn="ctr"/>
-          </a:p>
-        </p:txBody>
-      </p:sp>
-      <p:sp>
-        <p:nvSpPr>
-          <p:cNvPr id="19" name="TextBox 18"/>
-          <p:cNvSpPr txBox="1"/>
-          <p:nvPr/>
-        </p:nvSpPr>
-        <p:spPr>
-          <a:xfrm>
-            <a:off x="6656832" y="2880360"/>
-            <a:ext cx="5029200" cy="777240"/>
-          </a:xfrm>
-          <a:prstGeom prst="rect">
-            <a:avLst/>
-          </a:prstGeom>
-          <a:noFill/>
-        </p:spPr>
-        <p:txBody>
-          <a:bodyPr wrap="square">
-            <a:spAutoFit/>
-          </a:bodyPr>
-          <a:lstStyle/>
-          <a:p>
-            <a:pPr algn="l">
-              <a:defRPr sz="1600" b="0" i="0">
-                <a:solidFill>
-                  <a:srgbClr val="E8ECF4"/>
-                </a:solidFill>
-                <a:latin typeface="Arial"/>
-              </a:defRPr>
-            </a:pPr>
-            <a:r>
-              <a:t>Include OTHER CONSIDERATIONS — that's where edge cases live</a:t>
-            </a:r>
-          </a:p>
-        </p:txBody>
-      </p:sp>
-      <p:sp>
-        <p:nvSpPr>
-          <p:cNvPr id="20" name="Oval 19"/>
-          <p:cNvSpPr/>
-          <p:nvPr/>
-        </p:nvSpPr>
-        <p:spPr>
-          <a:xfrm>
-            <a:off x="6336792" y="3794760"/>
-            <a:ext cx="91440" cy="91440"/>
-          </a:xfrm>
-          <a:prstGeom prst="ellipse">
-            <a:avLst/>
-          </a:prstGeom>
-          <a:solidFill>
-            <a:srgbClr val="56C495"/>
-          </a:solidFill>
-          <a:ln>
-            <a:noFill/>
-          </a:ln>
-        </p:spPr>
-        <p:style>
-          <a:lnRef idx="1">
-            <a:schemeClr val="accent1"/>
-          </a:lnRef>
-          <a:fillRef idx="3">
-            <a:schemeClr val="accent1"/>
-          </a:fillRef>
-          <a:effectRef idx="2">
-            <a:schemeClr val="accent1"/>
-          </a:effectRef>
-          <a:fontRef idx="minor">
-            <a:schemeClr val="lt1"/>
-          </a:fontRef>
-        </p:style>
-        <p:txBody>
-          <a:bodyPr rtlCol="0" anchor="ctr"/>
-          <a:lstStyle/>
-          <a:p>
-            <a:pPr algn="ctr"/>
-          </a:p>
-        </p:txBody>
-      </p:sp>
-      <p:sp>
-        <p:nvSpPr>
-          <p:cNvPr id="21" name="TextBox 20"/>
-          <p:cNvSpPr txBox="1"/>
-          <p:nvPr/>
-        </p:nvSpPr>
-        <p:spPr>
-          <a:xfrm>
-            <a:off x="6656832" y="3657600"/>
-            <a:ext cx="5029200" cy="777240"/>
-          </a:xfrm>
-          <a:prstGeom prst="rect">
-            <a:avLst/>
-          </a:prstGeom>
-          <a:noFill/>
-        </p:spPr>
-        <p:txBody>
-          <a:bodyPr wrap="square">
-            <a:spAutoFit/>
-          </a:bodyPr>
-          <a:lstStyle/>
-          <a:p>
-            <a:pPr algn="l">
-              <a:defRPr sz="1600" b="0" i="0">
-                <a:solidFill>
-                  <a:srgbClr val="E8ECF4"/>
-                </a:solidFill>
-                <a:latin typeface="Arial"/>
-              </a:defRPr>
-            </a:pPr>
-            <a:r>
-              <a:t>Add more examples to improve quality over time</a:t>
-            </a:r>
-          </a:p>
-        </p:txBody>
-      </p:sp>
-      <p:sp>
-        <p:nvSpPr>
-          <p:cNvPr id="22" name="TextBox 21"/>
-          <p:cNvSpPr txBox="1"/>
-          <p:nvPr/>
-        </p:nvSpPr>
-        <p:spPr>
-          <a:xfrm>
-            <a:off x="457200" y="6263640"/>
-            <a:ext cx="11274552" cy="365760"/>
-          </a:xfrm>
-          <a:prstGeom prst="rect">
-            <a:avLst/>
-          </a:prstGeom>
-          <a:noFill/>
-        </p:spPr>
-        <p:txBody>
-          <a:bodyPr wrap="square">
-            <a:spAutoFit/>
-          </a:bodyPr>
-          <a:lstStyle/>
-          <a:p>
-            <a:pPr algn="ctr">
-              <a:defRPr sz="1400" b="0" i="1">
-                <a:solidFill>
-                  <a:srgbClr val="9CA3B4"/>
-                </a:solidFill>
-                <a:latin typeface="Arial"/>
-              </a:defRPr>
-            </a:pPr>
-            <a:r>
-              <a:t>A bad PRP executed perfectly still gives you bad code. Don't skip the review.</a:t>
-            </a:r>
-          </a:p>
-        </p:txBody>
-      </p:sp>
-      <p:sp>
-        <p:nvSpPr>
-          <p:cNvPr id="23" name="TextBox 22"/>
           <p:cNvSpPr txBox="1"/>
           <p:nvPr/>
         </p:nvSpPr>
@@ -8602,86 +8676,7 @@
         <p:spPr>
           <a:xfrm>
             <a:off x="0" y="0"/>
-            <a:ext cx="4114800" cy="6858000"/>
-          </a:xfrm>
-          <a:prstGeom prst="rect">
-            <a:avLst/>
-          </a:prstGeom>
-          <a:solidFill>
-            <a:srgbClr val="181D27"/>
-          </a:solidFill>
-          <a:ln>
-            <a:noFill/>
-          </a:ln>
-        </p:spPr>
-        <p:style>
-          <a:lnRef idx="1">
-            <a:schemeClr val="accent1"/>
-          </a:lnRef>
-          <a:fillRef idx="3">
-            <a:schemeClr val="accent1"/>
-          </a:fillRef>
-          <a:effectRef idx="2">
-            <a:schemeClr val="accent1"/>
-          </a:effectRef>
-          <a:fontRef idx="minor">
-            <a:schemeClr val="lt1"/>
-          </a:fontRef>
-        </p:style>
-        <p:txBody>
-          <a:bodyPr rtlCol="0" anchor="ctr"/>
-          <a:lstStyle/>
-          <a:p>
-            <a:pPr algn="ctr"/>
-          </a:p>
-        </p:txBody>
-      </p:sp>
-      <p:sp>
-        <p:nvSpPr>
-          <p:cNvPr id="3" name="TextBox 2"/>
-          <p:cNvSpPr txBox="1"/>
-          <p:nvPr/>
-        </p:nvSpPr>
-        <p:spPr>
-          <a:xfrm>
-            <a:off x="457200" y="2377440"/>
-            <a:ext cx="3200400" cy="1645920"/>
-          </a:xfrm>
-          <a:prstGeom prst="rect">
-            <a:avLst/>
-          </a:prstGeom>
-          <a:noFill/>
-        </p:spPr>
-        <p:txBody>
-          <a:bodyPr wrap="square">
-            <a:spAutoFit/>
-          </a:bodyPr>
-          <a:lstStyle/>
-          <a:p>
-            <a:pPr algn="ctr">
-              <a:defRPr sz="11000" b="1" i="0">
-                <a:solidFill>
-                  <a:srgbClr val="E8853D"/>
-                </a:solidFill>
-                <a:latin typeface="Arial"/>
-              </a:defRPr>
-            </a:pPr>
-            <a:r>
-              <a:t>19</a:t>
-            </a:r>
-          </a:p>
-        </p:txBody>
-      </p:sp>
-      <p:sp>
-        <p:nvSpPr>
-          <p:cNvPr id="4" name="Rectangle 3"/>
-          <p:cNvSpPr/>
-          <p:nvPr/>
-        </p:nvSpPr>
-        <p:spPr>
-          <a:xfrm>
-            <a:off x="4114800" y="1371600"/>
-            <a:ext cx="73152" cy="4114800"/>
+            <a:ext cx="12191695" cy="109728"/>
           </a:xfrm>
           <a:prstGeom prst="rect">
             <a:avLst/>
@@ -8717,14 +8712,14 @@
       </p:sp>
       <p:sp>
         <p:nvSpPr>
-          <p:cNvPr id="5" name="TextBox 4"/>
+          <p:cNvPr id="3" name="TextBox 2"/>
           <p:cNvSpPr txBox="1"/>
           <p:nvPr/>
         </p:nvSpPr>
         <p:spPr>
           <a:xfrm>
-            <a:off x="4754880" y="2377440"/>
-            <a:ext cx="6858000" cy="1371600"/>
+            <a:off x="457200" y="320040"/>
+            <a:ext cx="10972800" cy="777240"/>
           </a:xfrm>
           <a:prstGeom prst="rect">
             <a:avLst/>
@@ -8738,7 +8733,7 @@
           <a:lstStyle/>
           <a:p>
             <a:pPr algn="l">
-              <a:defRPr sz="4400" b="1" i="0">
+              <a:defRPr sz="2800" b="1" i="0">
                 <a:solidFill>
                   <a:srgbClr val="E8ECF4"/>
                 </a:solidFill>
@@ -8746,21 +8741,150 @@
               </a:defRPr>
             </a:pPr>
             <a:r>
-              <a:t>Exercise</a:t>
-            </a:r>
-          </a:p>
-        </p:txBody>
-      </p:sp>
-      <p:sp>
-        <p:nvSpPr>
-          <p:cNvPr id="6" name="TextBox 5"/>
+              <a:t>Tips &amp; Gotchas</a:t>
+            </a:r>
+          </a:p>
+        </p:txBody>
+      </p:sp>
+      <p:sp>
+        <p:nvSpPr>
+          <p:cNvPr id="4" name="Rectangle 3"/>
+          <p:cNvSpPr/>
+          <p:nvPr/>
+        </p:nvSpPr>
+        <p:spPr>
+          <a:xfrm>
+            <a:off x="5989320" y="1280160"/>
+            <a:ext cx="210312" cy="4937760"/>
+          </a:xfrm>
+          <a:prstGeom prst="rect">
+            <a:avLst/>
+          </a:prstGeom>
+          <a:solidFill>
+            <a:srgbClr val="313244"/>
+          </a:solidFill>
+          <a:ln>
+            <a:noFill/>
+          </a:ln>
+        </p:spPr>
+        <p:style>
+          <a:lnRef idx="1">
+            <a:schemeClr val="accent1"/>
+          </a:lnRef>
+          <a:fillRef idx="3">
+            <a:schemeClr val="accent1"/>
+          </a:fillRef>
+          <a:effectRef idx="2">
+            <a:schemeClr val="accent1"/>
+          </a:effectRef>
+          <a:fontRef idx="minor">
+            <a:schemeClr val="lt1"/>
+          </a:fontRef>
+        </p:style>
+        <p:txBody>
+          <a:bodyPr rtlCol="0" anchor="ctr"/>
+          <a:lstStyle/>
+          <a:p>
+            <a:pPr algn="ctr"/>
+          </a:p>
+        </p:txBody>
+      </p:sp>
+      <p:sp>
+        <p:nvSpPr>
+          <p:cNvPr id="5" name="Rectangle 4"/>
+          <p:cNvSpPr/>
+          <p:nvPr/>
+        </p:nvSpPr>
+        <p:spPr>
+          <a:xfrm>
+            <a:off x="6062472" y="1280160"/>
+            <a:ext cx="64008" cy="4937760"/>
+          </a:xfrm>
+          <a:prstGeom prst="rect">
+            <a:avLst/>
+          </a:prstGeom>
+          <a:solidFill>
+            <a:srgbClr val="E8853D"/>
+          </a:solidFill>
+          <a:ln>
+            <a:noFill/>
+          </a:ln>
+        </p:spPr>
+        <p:style>
+          <a:lnRef idx="1">
+            <a:schemeClr val="accent1"/>
+          </a:lnRef>
+          <a:fillRef idx="3">
+            <a:schemeClr val="accent1"/>
+          </a:fillRef>
+          <a:effectRef idx="2">
+            <a:schemeClr val="accent1"/>
+          </a:effectRef>
+          <a:fontRef idx="minor">
+            <a:schemeClr val="lt1"/>
+          </a:fontRef>
+        </p:style>
+        <p:txBody>
+          <a:bodyPr rtlCol="0" anchor="ctr"/>
+          <a:lstStyle/>
+          <a:p>
+            <a:pPr algn="ctr"/>
+          </a:p>
+        </p:txBody>
+      </p:sp>
+      <p:sp>
+        <p:nvSpPr>
+          <p:cNvPr id="6" name="Rectangle 5"/>
+          <p:cNvSpPr/>
+          <p:nvPr/>
+        </p:nvSpPr>
+        <p:spPr>
+          <a:xfrm>
+            <a:off x="457200" y="1417320"/>
+            <a:ext cx="137160" cy="457200"/>
+          </a:xfrm>
+          <a:prstGeom prst="rect">
+            <a:avLst/>
+          </a:prstGeom>
+          <a:solidFill>
+            <a:srgbClr val="F38BA8"/>
+          </a:solidFill>
+          <a:ln>
+            <a:noFill/>
+          </a:ln>
+        </p:spPr>
+        <p:style>
+          <a:lnRef idx="1">
+            <a:schemeClr val="accent1"/>
+          </a:lnRef>
+          <a:fillRef idx="3">
+            <a:schemeClr val="accent1"/>
+          </a:fillRef>
+          <a:effectRef idx="2">
+            <a:schemeClr val="accent1"/>
+          </a:effectRef>
+          <a:fontRef idx="minor">
+            <a:schemeClr val="lt1"/>
+          </a:fontRef>
+        </p:style>
+        <p:txBody>
+          <a:bodyPr rtlCol="0" anchor="ctr"/>
+          <a:lstStyle/>
+          <a:p>
+            <a:pPr algn="ctr"/>
+          </a:p>
+        </p:txBody>
+      </p:sp>
+      <p:sp>
+        <p:nvSpPr>
+          <p:cNvPr id="7" name="TextBox 6"/>
           <p:cNvSpPr txBox="1"/>
           <p:nvPr/>
         </p:nvSpPr>
         <p:spPr>
           <a:xfrm>
-            <a:off x="4754880" y="3840480"/>
-            <a:ext cx="6858000" cy="1280160"/>
+            <a:off x="777240" y="1371600"/>
+            <a:ext cx="5029200" cy="502920"/>
           </a:xfrm>
           <a:prstGeom prst="rect">
             <a:avLst/>
@@ -8774,7 +8898,596 @@
           <a:lstStyle/>
           <a:p>
             <a:pPr algn="l">
-              <a:defRPr sz="2000" b="0" i="0">
+              <a:defRPr sz="2200" b="1" i="0">
+                <a:solidFill>
+                  <a:srgbClr val="F38BA8"/>
+                </a:solidFill>
+                <a:latin typeface="Arial"/>
+              </a:defRPr>
+            </a:pPr>
+            <a:r>
+              <a:t>Don't</a:t>
+            </a:r>
+          </a:p>
+        </p:txBody>
+      </p:sp>
+      <p:sp>
+        <p:nvSpPr>
+          <p:cNvPr id="8" name="Oval 7"/>
+          <p:cNvSpPr/>
+          <p:nvPr/>
+        </p:nvSpPr>
+        <p:spPr>
+          <a:xfrm>
+            <a:off x="457200" y="2240279"/>
+            <a:ext cx="91440" cy="91440"/>
+          </a:xfrm>
+          <a:prstGeom prst="ellipse">
+            <a:avLst/>
+          </a:prstGeom>
+          <a:solidFill>
+            <a:srgbClr val="F38BA8"/>
+          </a:solidFill>
+          <a:ln>
+            <a:noFill/>
+          </a:ln>
+        </p:spPr>
+        <p:style>
+          <a:lnRef idx="1">
+            <a:schemeClr val="accent1"/>
+          </a:lnRef>
+          <a:fillRef idx="3">
+            <a:schemeClr val="accent1"/>
+          </a:fillRef>
+          <a:effectRef idx="2">
+            <a:schemeClr val="accent1"/>
+          </a:effectRef>
+          <a:fontRef idx="minor">
+            <a:schemeClr val="lt1"/>
+          </a:fontRef>
+        </p:style>
+        <p:txBody>
+          <a:bodyPr rtlCol="0" anchor="ctr"/>
+          <a:lstStyle/>
+          <a:p>
+            <a:pPr algn="ctr"/>
+          </a:p>
+        </p:txBody>
+      </p:sp>
+      <p:sp>
+        <p:nvSpPr>
+          <p:cNvPr id="9" name="TextBox 8"/>
+          <p:cNvSpPr txBox="1"/>
+          <p:nvPr/>
+        </p:nvSpPr>
+        <p:spPr>
+          <a:xfrm>
+            <a:off x="777240" y="2103120"/>
+            <a:ext cx="5029200" cy="777240"/>
+          </a:xfrm>
+          <a:prstGeom prst="rect">
+            <a:avLst/>
+          </a:prstGeom>
+          <a:noFill/>
+        </p:spPr>
+        <p:txBody>
+          <a:bodyPr wrap="square">
+            <a:spAutoFit/>
+          </a:bodyPr>
+          <a:lstStyle/>
+          <a:p>
+            <a:pPr algn="l">
+              <a:defRPr sz="1600" b="0" i="0">
+                <a:solidFill>
+                  <a:srgbClr val="E8ECF4"/>
+                </a:solidFill>
+                <a:latin typeface="Arial"/>
+              </a:defRPr>
+            </a:pPr>
+            <a:r>
+              <a:t>Skip INITIAL.md and go straight to coding</a:t>
+            </a:r>
+          </a:p>
+        </p:txBody>
+      </p:sp>
+      <p:sp>
+        <p:nvSpPr>
+          <p:cNvPr id="10" name="Oval 9"/>
+          <p:cNvSpPr/>
+          <p:nvPr/>
+        </p:nvSpPr>
+        <p:spPr>
+          <a:xfrm>
+            <a:off x="457200" y="3017520"/>
+            <a:ext cx="91440" cy="91440"/>
+          </a:xfrm>
+          <a:prstGeom prst="ellipse">
+            <a:avLst/>
+          </a:prstGeom>
+          <a:solidFill>
+            <a:srgbClr val="F38BA8"/>
+          </a:solidFill>
+          <a:ln>
+            <a:noFill/>
+          </a:ln>
+        </p:spPr>
+        <p:style>
+          <a:lnRef idx="1">
+            <a:schemeClr val="accent1"/>
+          </a:lnRef>
+          <a:fillRef idx="3">
+            <a:schemeClr val="accent1"/>
+          </a:fillRef>
+          <a:effectRef idx="2">
+            <a:schemeClr val="accent1"/>
+          </a:effectRef>
+          <a:fontRef idx="minor">
+            <a:schemeClr val="lt1"/>
+          </a:fontRef>
+        </p:style>
+        <p:txBody>
+          <a:bodyPr rtlCol="0" anchor="ctr"/>
+          <a:lstStyle/>
+          <a:p>
+            <a:pPr algn="ctr"/>
+          </a:p>
+        </p:txBody>
+      </p:sp>
+      <p:sp>
+        <p:nvSpPr>
+          <p:cNvPr id="11" name="TextBox 10"/>
+          <p:cNvSpPr txBox="1"/>
+          <p:nvPr/>
+        </p:nvSpPr>
+        <p:spPr>
+          <a:xfrm>
+            <a:off x="777240" y="2880360"/>
+            <a:ext cx="5029200" cy="777240"/>
+          </a:xfrm>
+          <a:prstGeom prst="rect">
+            <a:avLst/>
+          </a:prstGeom>
+          <a:noFill/>
+        </p:spPr>
+        <p:txBody>
+          <a:bodyPr wrap="square">
+            <a:spAutoFit/>
+          </a:bodyPr>
+          <a:lstStyle/>
+          <a:p>
+            <a:pPr algn="l">
+              <a:defRPr sz="1600" b="0" i="0">
+                <a:solidFill>
+                  <a:srgbClr val="E8ECF4"/>
+                </a:solidFill>
+                <a:latin typeface="Arial"/>
+              </a:defRPr>
+            </a:pPr>
+            <a:r>
+              <a:t>Write vague EXAMPLES sections</a:t>
+            </a:r>
+          </a:p>
+        </p:txBody>
+      </p:sp>
+      <p:sp>
+        <p:nvSpPr>
+          <p:cNvPr id="12" name="Oval 11"/>
+          <p:cNvSpPr/>
+          <p:nvPr/>
+        </p:nvSpPr>
+        <p:spPr>
+          <a:xfrm>
+            <a:off x="457200" y="3794760"/>
+            <a:ext cx="91440" cy="91440"/>
+          </a:xfrm>
+          <a:prstGeom prst="ellipse">
+            <a:avLst/>
+          </a:prstGeom>
+          <a:solidFill>
+            <a:srgbClr val="F38BA8"/>
+          </a:solidFill>
+          <a:ln>
+            <a:noFill/>
+          </a:ln>
+        </p:spPr>
+        <p:style>
+          <a:lnRef idx="1">
+            <a:schemeClr val="accent1"/>
+          </a:lnRef>
+          <a:fillRef idx="3">
+            <a:schemeClr val="accent1"/>
+          </a:fillRef>
+          <a:effectRef idx="2">
+            <a:schemeClr val="accent1"/>
+          </a:effectRef>
+          <a:fontRef idx="minor">
+            <a:schemeClr val="lt1"/>
+          </a:fontRef>
+        </p:style>
+        <p:txBody>
+          <a:bodyPr rtlCol="0" anchor="ctr"/>
+          <a:lstStyle/>
+          <a:p>
+            <a:pPr algn="ctr"/>
+          </a:p>
+        </p:txBody>
+      </p:sp>
+      <p:sp>
+        <p:nvSpPr>
+          <p:cNvPr id="13" name="TextBox 12"/>
+          <p:cNvSpPr txBox="1"/>
+          <p:nvPr/>
+        </p:nvSpPr>
+        <p:spPr>
+          <a:xfrm>
+            <a:off x="777240" y="3657600"/>
+            <a:ext cx="5029200" cy="777240"/>
+          </a:xfrm>
+          <a:prstGeom prst="rect">
+            <a:avLst/>
+          </a:prstGeom>
+          <a:noFill/>
+        </p:spPr>
+        <p:txBody>
+          <a:bodyPr wrap="square">
+            <a:spAutoFit/>
+          </a:bodyPr>
+          <a:lstStyle/>
+          <a:p>
+            <a:pPr algn="l">
+              <a:defRPr sz="1600" b="0" i="0">
+                <a:solidFill>
+                  <a:srgbClr val="E8ECF4"/>
+                </a:solidFill>
+                <a:latin typeface="Arial"/>
+              </a:defRPr>
+            </a:pPr>
+            <a:r>
+              <a:t>Expect perfection on the first PRP</a:t>
+            </a:r>
+          </a:p>
+        </p:txBody>
+      </p:sp>
+      <p:sp>
+        <p:nvSpPr>
+          <p:cNvPr id="14" name="Rectangle 13"/>
+          <p:cNvSpPr/>
+          <p:nvPr/>
+        </p:nvSpPr>
+        <p:spPr>
+          <a:xfrm>
+            <a:off x="6336792" y="1417320"/>
+            <a:ext cx="137160" cy="457200"/>
+          </a:xfrm>
+          <a:prstGeom prst="rect">
+            <a:avLst/>
+          </a:prstGeom>
+          <a:solidFill>
+            <a:srgbClr val="56C495"/>
+          </a:solidFill>
+          <a:ln>
+            <a:noFill/>
+          </a:ln>
+        </p:spPr>
+        <p:style>
+          <a:lnRef idx="1">
+            <a:schemeClr val="accent1"/>
+          </a:lnRef>
+          <a:fillRef idx="3">
+            <a:schemeClr val="accent1"/>
+          </a:fillRef>
+          <a:effectRef idx="2">
+            <a:schemeClr val="accent1"/>
+          </a:effectRef>
+          <a:fontRef idx="minor">
+            <a:schemeClr val="lt1"/>
+          </a:fontRef>
+        </p:style>
+        <p:txBody>
+          <a:bodyPr rtlCol="0" anchor="ctr"/>
+          <a:lstStyle/>
+          <a:p>
+            <a:pPr algn="ctr"/>
+          </a:p>
+        </p:txBody>
+      </p:sp>
+      <p:sp>
+        <p:nvSpPr>
+          <p:cNvPr id="15" name="TextBox 14"/>
+          <p:cNvSpPr txBox="1"/>
+          <p:nvPr/>
+        </p:nvSpPr>
+        <p:spPr>
+          <a:xfrm>
+            <a:off x="6656832" y="1371600"/>
+            <a:ext cx="5029200" cy="502920"/>
+          </a:xfrm>
+          <a:prstGeom prst="rect">
+            <a:avLst/>
+          </a:prstGeom>
+          <a:noFill/>
+        </p:spPr>
+        <p:txBody>
+          <a:bodyPr wrap="square">
+            <a:spAutoFit/>
+          </a:bodyPr>
+          <a:lstStyle/>
+          <a:p>
+            <a:pPr algn="l">
+              <a:defRPr sz="2200" b="1" i="0">
+                <a:solidFill>
+                  <a:srgbClr val="56C495"/>
+                </a:solidFill>
+                <a:latin typeface="Arial"/>
+              </a:defRPr>
+            </a:pPr>
+            <a:r>
+              <a:t>Do</a:t>
+            </a:r>
+          </a:p>
+        </p:txBody>
+      </p:sp>
+      <p:sp>
+        <p:nvSpPr>
+          <p:cNvPr id="16" name="Oval 15"/>
+          <p:cNvSpPr/>
+          <p:nvPr/>
+        </p:nvSpPr>
+        <p:spPr>
+          <a:xfrm>
+            <a:off x="6336792" y="2240279"/>
+            <a:ext cx="91440" cy="91440"/>
+          </a:xfrm>
+          <a:prstGeom prst="ellipse">
+            <a:avLst/>
+          </a:prstGeom>
+          <a:solidFill>
+            <a:srgbClr val="56C495"/>
+          </a:solidFill>
+          <a:ln>
+            <a:noFill/>
+          </a:ln>
+        </p:spPr>
+        <p:style>
+          <a:lnRef idx="1">
+            <a:schemeClr val="accent1"/>
+          </a:lnRef>
+          <a:fillRef idx="3">
+            <a:schemeClr val="accent1"/>
+          </a:fillRef>
+          <a:effectRef idx="2">
+            <a:schemeClr val="accent1"/>
+          </a:effectRef>
+          <a:fontRef idx="minor">
+            <a:schemeClr val="lt1"/>
+          </a:fontRef>
+        </p:style>
+        <p:txBody>
+          <a:bodyPr rtlCol="0" anchor="ctr"/>
+          <a:lstStyle/>
+          <a:p>
+            <a:pPr algn="ctr"/>
+          </a:p>
+        </p:txBody>
+      </p:sp>
+      <p:sp>
+        <p:nvSpPr>
+          <p:cNvPr id="17" name="TextBox 16"/>
+          <p:cNvSpPr txBox="1"/>
+          <p:nvPr/>
+        </p:nvSpPr>
+        <p:spPr>
+          <a:xfrm>
+            <a:off x="6656832" y="2103120"/>
+            <a:ext cx="5029200" cy="777240"/>
+          </a:xfrm>
+          <a:prstGeom prst="rect">
+            <a:avLst/>
+          </a:prstGeom>
+          <a:noFill/>
+        </p:spPr>
+        <p:txBody>
+          <a:bodyPr wrap="square">
+            <a:spAutoFit/>
+          </a:bodyPr>
+          <a:lstStyle/>
+          <a:p>
+            <a:pPr algn="l">
+              <a:defRPr sz="1600" b="0" i="0">
+                <a:solidFill>
+                  <a:srgbClr val="E8ECF4"/>
+                </a:solidFill>
+                <a:latin typeface="Arial"/>
+              </a:defRPr>
+            </a:pPr>
+            <a:r>
+              <a:t>Review the PRP before executing</a:t>
+            </a:r>
+          </a:p>
+        </p:txBody>
+      </p:sp>
+      <p:sp>
+        <p:nvSpPr>
+          <p:cNvPr id="18" name="Oval 17"/>
+          <p:cNvSpPr/>
+          <p:nvPr/>
+        </p:nvSpPr>
+        <p:spPr>
+          <a:xfrm>
+            <a:off x="6336792" y="3017520"/>
+            <a:ext cx="91440" cy="91440"/>
+          </a:xfrm>
+          <a:prstGeom prst="ellipse">
+            <a:avLst/>
+          </a:prstGeom>
+          <a:solidFill>
+            <a:srgbClr val="56C495"/>
+          </a:solidFill>
+          <a:ln>
+            <a:noFill/>
+          </a:ln>
+        </p:spPr>
+        <p:style>
+          <a:lnRef idx="1">
+            <a:schemeClr val="accent1"/>
+          </a:lnRef>
+          <a:fillRef idx="3">
+            <a:schemeClr val="accent1"/>
+          </a:fillRef>
+          <a:effectRef idx="2">
+            <a:schemeClr val="accent1"/>
+          </a:effectRef>
+          <a:fontRef idx="minor">
+            <a:schemeClr val="lt1"/>
+          </a:fontRef>
+        </p:style>
+        <p:txBody>
+          <a:bodyPr rtlCol="0" anchor="ctr"/>
+          <a:lstStyle/>
+          <a:p>
+            <a:pPr algn="ctr"/>
+          </a:p>
+        </p:txBody>
+      </p:sp>
+      <p:sp>
+        <p:nvSpPr>
+          <p:cNvPr id="19" name="TextBox 18"/>
+          <p:cNvSpPr txBox="1"/>
+          <p:nvPr/>
+        </p:nvSpPr>
+        <p:spPr>
+          <a:xfrm>
+            <a:off x="6656832" y="2880360"/>
+            <a:ext cx="5029200" cy="777240"/>
+          </a:xfrm>
+          <a:prstGeom prst="rect">
+            <a:avLst/>
+          </a:prstGeom>
+          <a:noFill/>
+        </p:spPr>
+        <p:txBody>
+          <a:bodyPr wrap="square">
+            <a:spAutoFit/>
+          </a:bodyPr>
+          <a:lstStyle/>
+          <a:p>
+            <a:pPr algn="l">
+              <a:defRPr sz="1600" b="0" i="0">
+                <a:solidFill>
+                  <a:srgbClr val="E8ECF4"/>
+                </a:solidFill>
+                <a:latin typeface="Arial"/>
+              </a:defRPr>
+            </a:pPr>
+            <a:r>
+              <a:t>Include OTHER CONSIDERATIONS — that's where edge cases live</a:t>
+            </a:r>
+          </a:p>
+        </p:txBody>
+      </p:sp>
+      <p:sp>
+        <p:nvSpPr>
+          <p:cNvPr id="20" name="Oval 19"/>
+          <p:cNvSpPr/>
+          <p:nvPr/>
+        </p:nvSpPr>
+        <p:spPr>
+          <a:xfrm>
+            <a:off x="6336792" y="3794760"/>
+            <a:ext cx="91440" cy="91440"/>
+          </a:xfrm>
+          <a:prstGeom prst="ellipse">
+            <a:avLst/>
+          </a:prstGeom>
+          <a:solidFill>
+            <a:srgbClr val="56C495"/>
+          </a:solidFill>
+          <a:ln>
+            <a:noFill/>
+          </a:ln>
+        </p:spPr>
+        <p:style>
+          <a:lnRef idx="1">
+            <a:schemeClr val="accent1"/>
+          </a:lnRef>
+          <a:fillRef idx="3">
+            <a:schemeClr val="accent1"/>
+          </a:fillRef>
+          <a:effectRef idx="2">
+            <a:schemeClr val="accent1"/>
+          </a:effectRef>
+          <a:fontRef idx="minor">
+            <a:schemeClr val="lt1"/>
+          </a:fontRef>
+        </p:style>
+        <p:txBody>
+          <a:bodyPr rtlCol="0" anchor="ctr"/>
+          <a:lstStyle/>
+          <a:p>
+            <a:pPr algn="ctr"/>
+          </a:p>
+        </p:txBody>
+      </p:sp>
+      <p:sp>
+        <p:nvSpPr>
+          <p:cNvPr id="21" name="TextBox 20"/>
+          <p:cNvSpPr txBox="1"/>
+          <p:nvPr/>
+        </p:nvSpPr>
+        <p:spPr>
+          <a:xfrm>
+            <a:off x="6656832" y="3657600"/>
+            <a:ext cx="5029200" cy="777240"/>
+          </a:xfrm>
+          <a:prstGeom prst="rect">
+            <a:avLst/>
+          </a:prstGeom>
+          <a:noFill/>
+        </p:spPr>
+        <p:txBody>
+          <a:bodyPr wrap="square">
+            <a:spAutoFit/>
+          </a:bodyPr>
+          <a:lstStyle/>
+          <a:p>
+            <a:pPr algn="l">
+              <a:defRPr sz="1600" b="0" i="0">
+                <a:solidFill>
+                  <a:srgbClr val="E8ECF4"/>
+                </a:solidFill>
+                <a:latin typeface="Arial"/>
+              </a:defRPr>
+            </a:pPr>
+            <a:r>
+              <a:t>Add more examples to improve quality over time</a:t>
+            </a:r>
+          </a:p>
+        </p:txBody>
+      </p:sp>
+      <p:sp>
+        <p:nvSpPr>
+          <p:cNvPr id="22" name="TextBox 21"/>
+          <p:cNvSpPr txBox="1"/>
+          <p:nvPr/>
+        </p:nvSpPr>
+        <p:spPr>
+          <a:xfrm>
+            <a:off x="457200" y="6263640"/>
+            <a:ext cx="11274552" cy="365760"/>
+          </a:xfrm>
+          <a:prstGeom prst="rect">
+            <a:avLst/>
+          </a:prstGeom>
+          <a:noFill/>
+        </p:spPr>
+        <p:txBody>
+          <a:bodyPr wrap="square">
+            <a:spAutoFit/>
+          </a:bodyPr>
+          <a:lstStyle/>
+          <a:p>
+            <a:pPr algn="ctr">
+              <a:defRPr sz="1400" b="0" i="1">
                 <a:solidFill>
                   <a:srgbClr val="9CA3B4"/>
                 </a:solidFill>
@@ -8782,14 +9495,14 @@
               </a:defRPr>
             </a:pPr>
             <a:r>
-              <a:t>Build the comms and scheduling pipeline via PRP — about 40 minutes</a:t>
-            </a:r>
-          </a:p>
-        </p:txBody>
-      </p:sp>
-      <p:sp>
-        <p:nvSpPr>
-          <p:cNvPr id="7" name="TextBox 6"/>
+              <a:t>A bad PRP executed perfectly still gives you bad code. Don't skip the review.</a:t>
+            </a:r>
+          </a:p>
+        </p:txBody>
+      </p:sp>
+      <p:sp>
+        <p:nvSpPr>
+          <p:cNvPr id="23" name="TextBox 22"/>
           <p:cNvSpPr txBox="1"/>
           <p:nvPr/>
         </p:nvSpPr>
@@ -9430,7 +10143,86 @@
         <p:spPr>
           <a:xfrm>
             <a:off x="0" y="0"/>
-            <a:ext cx="73152" cy="6858000"/>
+            <a:ext cx="4114800" cy="6858000"/>
+          </a:xfrm>
+          <a:prstGeom prst="rect">
+            <a:avLst/>
+          </a:prstGeom>
+          <a:solidFill>
+            <a:srgbClr val="181D27"/>
+          </a:solidFill>
+          <a:ln>
+            <a:noFill/>
+          </a:ln>
+        </p:spPr>
+        <p:style>
+          <a:lnRef idx="1">
+            <a:schemeClr val="accent1"/>
+          </a:lnRef>
+          <a:fillRef idx="3">
+            <a:schemeClr val="accent1"/>
+          </a:fillRef>
+          <a:effectRef idx="2">
+            <a:schemeClr val="accent1"/>
+          </a:effectRef>
+          <a:fontRef idx="minor">
+            <a:schemeClr val="lt1"/>
+          </a:fontRef>
+        </p:style>
+        <p:txBody>
+          <a:bodyPr rtlCol="0" anchor="ctr"/>
+          <a:lstStyle/>
+          <a:p>
+            <a:pPr algn="ctr"/>
+          </a:p>
+        </p:txBody>
+      </p:sp>
+      <p:sp>
+        <p:nvSpPr>
+          <p:cNvPr id="3" name="TextBox 2"/>
+          <p:cNvSpPr txBox="1"/>
+          <p:nvPr/>
+        </p:nvSpPr>
+        <p:spPr>
+          <a:xfrm>
+            <a:off x="457200" y="2377440"/>
+            <a:ext cx="3200400" cy="1645920"/>
+          </a:xfrm>
+          <a:prstGeom prst="rect">
+            <a:avLst/>
+          </a:prstGeom>
+          <a:noFill/>
+        </p:spPr>
+        <p:txBody>
+          <a:bodyPr wrap="square">
+            <a:spAutoFit/>
+          </a:bodyPr>
+          <a:lstStyle/>
+          <a:p>
+            <a:pPr algn="ctr">
+              <a:defRPr sz="11000" b="1" i="0">
+                <a:solidFill>
+                  <a:srgbClr val="E8853D"/>
+                </a:solidFill>
+                <a:latin typeface="Arial"/>
+              </a:defRPr>
+            </a:pPr>
+            <a:r>
+              <a:t>20</a:t>
+            </a:r>
+          </a:p>
+        </p:txBody>
+      </p:sp>
+      <p:sp>
+        <p:nvSpPr>
+          <p:cNvPr id="4" name="Rectangle 3"/>
+          <p:cNvSpPr/>
+          <p:nvPr/>
+        </p:nvSpPr>
+        <p:spPr>
+          <a:xfrm>
+            <a:off x="4114800" y="1371600"/>
+            <a:ext cx="73152" cy="4114800"/>
           </a:xfrm>
           <a:prstGeom prst="rect">
             <a:avLst/>
@@ -9466,14 +10258,14 @@
       </p:sp>
       <p:sp>
         <p:nvSpPr>
-          <p:cNvPr id="3" name="TextBox 2"/>
+          <p:cNvPr id="5" name="TextBox 4"/>
           <p:cNvSpPr txBox="1"/>
           <p:nvPr/>
         </p:nvSpPr>
         <p:spPr>
           <a:xfrm>
-            <a:off x="548640" y="365760"/>
-            <a:ext cx="10972800" cy="822960"/>
+            <a:off x="4754880" y="2377440"/>
+            <a:ext cx="6858000" cy="1371600"/>
           </a:xfrm>
           <a:prstGeom prst="rect">
             <a:avLst/>
@@ -9487,7 +10279,7 @@
           <a:lstStyle/>
           <a:p>
             <a:pPr algn="l">
-              <a:defRPr sz="3200" b="1" i="0">
+              <a:defRPr sz="4400" b="1" i="0">
                 <a:solidFill>
                   <a:srgbClr val="E8ECF4"/>
                 </a:solidFill>
@@ -9495,64 +10287,21 @@
               </a:defRPr>
             </a:pPr>
             <a:r>
-              <a:t>Checkpoint</a:t>
-            </a:r>
-          </a:p>
-        </p:txBody>
-      </p:sp>
-      <p:sp>
-        <p:nvSpPr>
-          <p:cNvPr id="4" name="Rectangle 3"/>
-          <p:cNvSpPr/>
-          <p:nvPr/>
-        </p:nvSpPr>
-        <p:spPr>
-          <a:xfrm>
-            <a:off x="548640" y="1207008"/>
-            <a:ext cx="2286000" cy="54864"/>
-          </a:xfrm>
-          <a:prstGeom prst="rect">
-            <a:avLst/>
-          </a:prstGeom>
-          <a:solidFill>
-            <a:srgbClr val="5B9CF5"/>
-          </a:solidFill>
-          <a:ln>
-            <a:noFill/>
-          </a:ln>
-        </p:spPr>
-        <p:style>
-          <a:lnRef idx="1">
-            <a:schemeClr val="accent1"/>
-          </a:lnRef>
-          <a:fillRef idx="3">
-            <a:schemeClr val="accent1"/>
-          </a:fillRef>
-          <a:effectRef idx="2">
-            <a:schemeClr val="accent1"/>
-          </a:effectRef>
-          <a:fontRef idx="minor">
-            <a:schemeClr val="lt1"/>
-          </a:fontRef>
-        </p:style>
-        <p:txBody>
-          <a:bodyPr rtlCol="0" anchor="ctr"/>
-          <a:lstStyle/>
-          <a:p>
-            <a:pPr algn="ctr"/>
-          </a:p>
-        </p:txBody>
-      </p:sp>
-      <p:sp>
-        <p:nvSpPr>
-          <p:cNvPr id="5" name="TextBox 4"/>
+              <a:t>Exercise</a:t>
+            </a:r>
+          </a:p>
+        </p:txBody>
+      </p:sp>
+      <p:sp>
+        <p:nvSpPr>
+          <p:cNvPr id="6" name="TextBox 5"/>
           <p:cNvSpPr txBox="1"/>
           <p:nvPr/>
         </p:nvSpPr>
         <p:spPr>
           <a:xfrm>
-            <a:off x="548640" y="1508760"/>
-            <a:ext cx="10972800" cy="640080"/>
+            <a:off x="4754880" y="3840480"/>
+            <a:ext cx="6858000" cy="1280160"/>
           </a:xfrm>
           <a:prstGeom prst="rect">
             <a:avLst/>
@@ -9566,7 +10315,7 @@
           <a:lstStyle/>
           <a:p>
             <a:pPr algn="l">
-              <a:defRPr sz="1900" b="0" i="1">
+              <a:defRPr sz="2000" b="0" i="0">
                 <a:solidFill>
                   <a:srgbClr val="9CA3B4"/>
                 </a:solidFill>
@@ -9574,411 +10323,14 @@
               </a:defRPr>
             </a:pPr>
             <a:r>
-              <a:t>You should have:</a:t>
-            </a:r>
-          </a:p>
-        </p:txBody>
-      </p:sp>
-      <p:sp>
-        <p:nvSpPr>
-          <p:cNvPr id="6" name="Rectangle 5"/>
-          <p:cNvSpPr/>
-          <p:nvPr/>
-        </p:nvSpPr>
-        <p:spPr>
-          <a:xfrm>
-            <a:off x="548640" y="2450592"/>
-            <a:ext cx="109728" cy="109728"/>
-          </a:xfrm>
-          <a:prstGeom prst="rect">
-            <a:avLst/>
-          </a:prstGeom>
-          <a:solidFill>
-            <a:srgbClr val="E8853D"/>
-          </a:solidFill>
-          <a:ln>
-            <a:noFill/>
-          </a:ln>
-        </p:spPr>
-        <p:style>
-          <a:lnRef idx="1">
-            <a:schemeClr val="accent1"/>
-          </a:lnRef>
-          <a:fillRef idx="3">
-            <a:schemeClr val="accent1"/>
-          </a:fillRef>
-          <a:effectRef idx="2">
-            <a:schemeClr val="accent1"/>
-          </a:effectRef>
-          <a:fontRef idx="minor">
-            <a:schemeClr val="lt1"/>
-          </a:fontRef>
-        </p:style>
-        <p:txBody>
-          <a:bodyPr rtlCol="0" anchor="ctr"/>
-          <a:lstStyle/>
-          <a:p>
-            <a:pPr algn="ctr"/>
+              <a:t>Build the comms and scheduling pipeline via PRP — about 40 minutes</a:t>
+            </a:r>
           </a:p>
         </p:txBody>
       </p:sp>
       <p:sp>
         <p:nvSpPr>
           <p:cNvPr id="7" name="TextBox 6"/>
-          <p:cNvSpPr txBox="1"/>
-          <p:nvPr/>
-        </p:nvSpPr>
-        <p:spPr>
-          <a:xfrm>
-            <a:off x="914400" y="2286000"/>
-            <a:ext cx="10515600" cy="868680"/>
-          </a:xfrm>
-          <a:prstGeom prst="rect">
-            <a:avLst/>
-          </a:prstGeom>
-          <a:noFill/>
-        </p:spPr>
-        <p:txBody>
-          <a:bodyPr wrap="square">
-            <a:spAutoFit/>
-          </a:bodyPr>
-          <a:lstStyle/>
-          <a:p>
-            <a:pPr algn="l">
-              <a:defRPr sz="1800" b="0" i="0">
-                <a:solidFill>
-                  <a:srgbClr val="E8ECF4"/>
-                </a:solidFill>
-                <a:latin typeface="Arial"/>
-              </a:defRPr>
-            </a:pPr>
-            <a:r>
-              <a:t>INITIAL.md with a complete feature request</a:t>
-            </a:r>
-          </a:p>
-        </p:txBody>
-      </p:sp>
-      <p:sp>
-        <p:nvSpPr>
-          <p:cNvPr id="8" name="Rectangle 7"/>
-          <p:cNvSpPr/>
-          <p:nvPr/>
-        </p:nvSpPr>
-        <p:spPr>
-          <a:xfrm>
-            <a:off x="548640" y="3364992"/>
-            <a:ext cx="109728" cy="109728"/>
-          </a:xfrm>
-          <a:prstGeom prst="rect">
-            <a:avLst/>
-          </a:prstGeom>
-          <a:solidFill>
-            <a:srgbClr val="E8853D"/>
-          </a:solidFill>
-          <a:ln>
-            <a:noFill/>
-          </a:ln>
-        </p:spPr>
-        <p:style>
-          <a:lnRef idx="1">
-            <a:schemeClr val="accent1"/>
-          </a:lnRef>
-          <a:fillRef idx="3">
-            <a:schemeClr val="accent1"/>
-          </a:fillRef>
-          <a:effectRef idx="2">
-            <a:schemeClr val="accent1"/>
-          </a:effectRef>
-          <a:fontRef idx="minor">
-            <a:schemeClr val="lt1"/>
-          </a:fontRef>
-        </p:style>
-        <p:txBody>
-          <a:bodyPr rtlCol="0" anchor="ctr"/>
-          <a:lstStyle/>
-          <a:p>
-            <a:pPr algn="ctr"/>
-          </a:p>
-        </p:txBody>
-      </p:sp>
-      <p:sp>
-        <p:nvSpPr>
-          <p:cNvPr id="9" name="TextBox 8"/>
-          <p:cNvSpPr txBox="1"/>
-          <p:nvPr/>
-        </p:nvSpPr>
-        <p:spPr>
-          <a:xfrm>
-            <a:off x="914400" y="3200400"/>
-            <a:ext cx="10515600" cy="868680"/>
-          </a:xfrm>
-          <a:prstGeom prst="rect">
-            <a:avLst/>
-          </a:prstGeom>
-          <a:noFill/>
-        </p:spPr>
-        <p:txBody>
-          <a:bodyPr wrap="square">
-            <a:spAutoFit/>
-          </a:bodyPr>
-          <a:lstStyle/>
-          <a:p>
-            <a:pPr algn="l">
-              <a:defRPr sz="1800" b="0" i="0">
-                <a:solidFill>
-                  <a:srgbClr val="E8ECF4"/>
-                </a:solidFill>
-                <a:latin typeface="Arial"/>
-              </a:defRPr>
-            </a:pPr>
-            <a:r>
-              <a:t>Generated PRP in PRPs/</a:t>
-            </a:r>
-          </a:p>
-        </p:txBody>
-      </p:sp>
-      <p:sp>
-        <p:nvSpPr>
-          <p:cNvPr id="10" name="Rectangle 9"/>
-          <p:cNvSpPr/>
-          <p:nvPr/>
-        </p:nvSpPr>
-        <p:spPr>
-          <a:xfrm>
-            <a:off x="548640" y="4279392"/>
-            <a:ext cx="109728" cy="109728"/>
-          </a:xfrm>
-          <a:prstGeom prst="rect">
-            <a:avLst/>
-          </a:prstGeom>
-          <a:solidFill>
-            <a:srgbClr val="E8853D"/>
-          </a:solidFill>
-          <a:ln>
-            <a:noFill/>
-          </a:ln>
-        </p:spPr>
-        <p:style>
-          <a:lnRef idx="1">
-            <a:schemeClr val="accent1"/>
-          </a:lnRef>
-          <a:fillRef idx="3">
-            <a:schemeClr val="accent1"/>
-          </a:fillRef>
-          <a:effectRef idx="2">
-            <a:schemeClr val="accent1"/>
-          </a:effectRef>
-          <a:fontRef idx="minor">
-            <a:schemeClr val="lt1"/>
-          </a:fontRef>
-        </p:style>
-        <p:txBody>
-          <a:bodyPr rtlCol="0" anchor="ctr"/>
-          <a:lstStyle/>
-          <a:p>
-            <a:pPr algn="ctr"/>
-          </a:p>
-        </p:txBody>
-      </p:sp>
-      <p:sp>
-        <p:nvSpPr>
-          <p:cNvPr id="11" name="TextBox 10"/>
-          <p:cNvSpPr txBox="1"/>
-          <p:nvPr/>
-        </p:nvSpPr>
-        <p:spPr>
-          <a:xfrm>
-            <a:off x="914400" y="4114800"/>
-            <a:ext cx="10515600" cy="868680"/>
-          </a:xfrm>
-          <a:prstGeom prst="rect">
-            <a:avLst/>
-          </a:prstGeom>
-          <a:noFill/>
-        </p:spPr>
-        <p:txBody>
-          <a:bodyPr wrap="square">
-            <a:spAutoFit/>
-          </a:bodyPr>
-          <a:lstStyle/>
-          <a:p>
-            <a:pPr algn="l">
-              <a:defRPr sz="1800" b="0" i="0">
-                <a:solidFill>
-                  <a:srgbClr val="E8ECF4"/>
-                </a:solidFill>
-                <a:latin typeface="Arial"/>
-              </a:defRPr>
-            </a:pPr>
-            <a:r>
-              <a:t>/build-schedule, /draft-announcement, /draft-speaker-outreach all working</a:t>
-            </a:r>
-          </a:p>
-        </p:txBody>
-      </p:sp>
-      <p:sp>
-        <p:nvSpPr>
-          <p:cNvPr id="12" name="Rectangle 11"/>
-          <p:cNvSpPr/>
-          <p:nvPr/>
-        </p:nvSpPr>
-        <p:spPr>
-          <a:xfrm>
-            <a:off x="548640" y="5193792"/>
-            <a:ext cx="109728" cy="109728"/>
-          </a:xfrm>
-          <a:prstGeom prst="rect">
-            <a:avLst/>
-          </a:prstGeom>
-          <a:solidFill>
-            <a:srgbClr val="E8853D"/>
-          </a:solidFill>
-          <a:ln>
-            <a:noFill/>
-          </a:ln>
-        </p:spPr>
-        <p:style>
-          <a:lnRef idx="1">
-            <a:schemeClr val="accent1"/>
-          </a:lnRef>
-          <a:fillRef idx="3">
-            <a:schemeClr val="accent1"/>
-          </a:fillRef>
-          <a:effectRef idx="2">
-            <a:schemeClr val="accent1"/>
-          </a:effectRef>
-          <a:fontRef idx="minor">
-            <a:schemeClr val="lt1"/>
-          </a:fontRef>
-        </p:style>
-        <p:txBody>
-          <a:bodyPr rtlCol="0" anchor="ctr"/>
-          <a:lstStyle/>
-          <a:p>
-            <a:pPr algn="ctr"/>
-          </a:p>
-        </p:txBody>
-      </p:sp>
-      <p:sp>
-        <p:nvSpPr>
-          <p:cNvPr id="13" name="TextBox 12"/>
-          <p:cNvSpPr txBox="1"/>
-          <p:nvPr/>
-        </p:nvSpPr>
-        <p:spPr>
-          <a:xfrm>
-            <a:off x="914400" y="5029200"/>
-            <a:ext cx="10515600" cy="868680"/>
-          </a:xfrm>
-          <a:prstGeom prst="rect">
-            <a:avLst/>
-          </a:prstGeom>
-          <a:noFill/>
-        </p:spPr>
-        <p:txBody>
-          <a:bodyPr wrap="square">
-            <a:spAutoFit/>
-          </a:bodyPr>
-          <a:lstStyle/>
-          <a:p>
-            <a:pPr algn="l">
-              <a:defRPr sz="1800" b="0" i="0">
-                <a:solidFill>
-                  <a:srgbClr val="E8ECF4"/>
-                </a:solidFill>
-                <a:latin typeface="Arial"/>
-              </a:defRPr>
-            </a:pPr>
-            <a:r>
-              <a:t>All commands consuming JSON from previous steps</a:t>
-            </a:r>
-          </a:p>
-        </p:txBody>
-      </p:sp>
-      <p:sp>
-        <p:nvSpPr>
-          <p:cNvPr id="14" name="Rounded Rectangle 13"/>
-          <p:cNvSpPr/>
-          <p:nvPr/>
-        </p:nvSpPr>
-        <p:spPr>
-          <a:xfrm>
-            <a:off x="548640" y="6035040"/>
-            <a:ext cx="10972800" cy="640080"/>
-          </a:xfrm>
-          <a:prstGeom prst="roundRect">
-            <a:avLst/>
-          </a:prstGeom>
-          <a:solidFill>
-            <a:srgbClr val="0A0D12"/>
-          </a:solidFill>
-          <a:ln>
-            <a:solidFill>
-              <a:srgbClr val="313244"/>
-            </a:solidFill>
-          </a:ln>
-        </p:spPr>
-        <p:style>
-          <a:lnRef idx="1">
-            <a:schemeClr val="accent1"/>
-          </a:lnRef>
-          <a:fillRef idx="3">
-            <a:schemeClr val="accent1"/>
-          </a:fillRef>
-          <a:effectRef idx="2">
-            <a:schemeClr val="accent1"/>
-          </a:effectRef>
-          <a:fontRef idx="minor">
-            <a:schemeClr val="lt1"/>
-          </a:fontRef>
-        </p:style>
-        <p:txBody>
-          <a:bodyPr rtlCol="0" anchor="ctr"/>
-          <a:lstStyle/>
-          <a:p>
-            <a:pPr algn="ctr"/>
-          </a:p>
-        </p:txBody>
-      </p:sp>
-      <p:sp>
-        <p:nvSpPr>
-          <p:cNvPr id="15" name="TextBox 14"/>
-          <p:cNvSpPr txBox="1"/>
-          <p:nvPr/>
-        </p:nvSpPr>
-        <p:spPr>
-          <a:xfrm>
-            <a:off x="777240" y="6144768"/>
-            <a:ext cx="10515600" cy="457200"/>
-          </a:xfrm>
-          <a:prstGeom prst="rect">
-            <a:avLst/>
-          </a:prstGeom>
-          <a:noFill/>
-        </p:spPr>
-        <p:txBody>
-          <a:bodyPr wrap="square">
-            <a:spAutoFit/>
-          </a:bodyPr>
-          <a:lstStyle/>
-          <a:p>
-            <a:pPr algn="l">
-              <a:defRPr sz="1400" b="0" i="0">
-                <a:solidFill>
-                  <a:srgbClr val="E8ECF4"/>
-                </a:solidFill>
-                <a:latin typeface="Courier New"/>
-              </a:defRPr>
-            </a:pPr>
-            <a:r>
-              <a:t>Quick test:   /plan-event "Topic"  --&gt;  /build-schedule  --&gt;  /draft-announcement</a:t>
-            </a:r>
-          </a:p>
-        </p:txBody>
-      </p:sp>
-      <p:sp>
-        <p:nvSpPr>
-          <p:cNvPr id="16" name="TextBox 15"/>
           <p:cNvSpPr txBox="1"/>
           <p:nvPr/>
         </p:nvSpPr>
@@ -10112,7 +10464,7 @@
               </a:defRPr>
             </a:pPr>
             <a:r>
-              <a:t>What's Next — Session 3</a:t>
+              <a:t>Checkpoint</a:t>
             </a:r>
           </a:p>
         </p:txBody>
@@ -10191,7 +10543,7 @@
               </a:defRPr>
             </a:pPr>
             <a:r>
-              <a:t>Subagents &amp; Hooks</a:t>
+              <a:t>You should have:</a:t>
             </a:r>
           </a:p>
         </p:txBody>
@@ -10270,7 +10622,7 @@
               </a:defRPr>
             </a:pPr>
             <a:r>
-              <a:t>Subagents — split into specialists (schedule optimizer, comms reviewer, quality checker)</a:t>
+              <a:t>INITIAL.md with a complete feature request</a:t>
             </a:r>
           </a:p>
         </p:txBody>
@@ -10349,21 +10701,64 @@
               </a:defRPr>
             </a:pPr>
             <a:r>
-              <a:t>Hooks — automate checks that run on every command</a:t>
-            </a:r>
-          </a:p>
-        </p:txBody>
-      </p:sp>
-      <p:sp>
-        <p:nvSpPr>
-          <p:cNvPr id="10" name="TextBox 9"/>
+              <a:t>Generated PRP in PRPs/</a:t>
+            </a:r>
+          </a:p>
+        </p:txBody>
+      </p:sp>
+      <p:sp>
+        <p:nvSpPr>
+          <p:cNvPr id="10" name="Rectangle 9"/>
+          <p:cNvSpPr/>
+          <p:nvPr/>
+        </p:nvSpPr>
+        <p:spPr>
+          <a:xfrm>
+            <a:off x="548640" y="4279392"/>
+            <a:ext cx="109728" cy="109728"/>
+          </a:xfrm>
+          <a:prstGeom prst="rect">
+            <a:avLst/>
+          </a:prstGeom>
+          <a:solidFill>
+            <a:srgbClr val="E8853D"/>
+          </a:solidFill>
+          <a:ln>
+            <a:noFill/>
+          </a:ln>
+        </p:spPr>
+        <p:style>
+          <a:lnRef idx="1">
+            <a:schemeClr val="accent1"/>
+          </a:lnRef>
+          <a:fillRef idx="3">
+            <a:schemeClr val="accent1"/>
+          </a:fillRef>
+          <a:effectRef idx="2">
+            <a:schemeClr val="accent1"/>
+          </a:effectRef>
+          <a:fontRef idx="minor">
+            <a:schemeClr val="lt1"/>
+          </a:fontRef>
+        </p:style>
+        <p:txBody>
+          <a:bodyPr rtlCol="0" anchor="ctr"/>
+          <a:lstStyle/>
+          <a:p>
+            <a:pPr algn="ctr"/>
+          </a:p>
+        </p:txBody>
+      </p:sp>
+      <p:sp>
+        <p:nvSpPr>
+          <p:cNvPr id="11" name="TextBox 10"/>
           <p:cNvSpPr txBox="1"/>
           <p:nvPr/>
         </p:nvSpPr>
         <p:spPr>
           <a:xfrm>
-            <a:off x="548640" y="6126480"/>
-            <a:ext cx="10972800" cy="365760"/>
+            <a:off x="914400" y="4114800"/>
+            <a:ext cx="10515600" cy="868680"/>
           </a:xfrm>
           <a:prstGeom prst="rect">
             <a:avLst/>
@@ -10377,22 +10772,182 @@
           <a:lstStyle/>
           <a:p>
             <a:pPr algn="l">
-              <a:defRPr sz="1400" b="0" i="1">
-                <a:solidFill>
-                  <a:srgbClr val="9CA3B4"/>
+              <a:defRPr sz="1800" b="0" i="0">
+                <a:solidFill>
+                  <a:srgbClr val="E8ECF4"/>
                 </a:solidFill>
                 <a:latin typeface="Arial"/>
               </a:defRPr>
             </a:pPr>
             <a:r>
-              <a:t>Right now, one agent does everything. Next session: a coordinated team.</a:t>
-            </a:r>
-          </a:p>
-        </p:txBody>
-      </p:sp>
-      <p:sp>
-        <p:nvSpPr>
-          <p:cNvPr id="11" name="TextBox 10"/>
+              <a:t>/build-schedule, /draft-announcement, /draft-speaker-outreach all working</a:t>
+            </a:r>
+          </a:p>
+        </p:txBody>
+      </p:sp>
+      <p:sp>
+        <p:nvSpPr>
+          <p:cNvPr id="12" name="Rectangle 11"/>
+          <p:cNvSpPr/>
+          <p:nvPr/>
+        </p:nvSpPr>
+        <p:spPr>
+          <a:xfrm>
+            <a:off x="548640" y="5193792"/>
+            <a:ext cx="109728" cy="109728"/>
+          </a:xfrm>
+          <a:prstGeom prst="rect">
+            <a:avLst/>
+          </a:prstGeom>
+          <a:solidFill>
+            <a:srgbClr val="E8853D"/>
+          </a:solidFill>
+          <a:ln>
+            <a:noFill/>
+          </a:ln>
+        </p:spPr>
+        <p:style>
+          <a:lnRef idx="1">
+            <a:schemeClr val="accent1"/>
+          </a:lnRef>
+          <a:fillRef idx="3">
+            <a:schemeClr val="accent1"/>
+          </a:fillRef>
+          <a:effectRef idx="2">
+            <a:schemeClr val="accent1"/>
+          </a:effectRef>
+          <a:fontRef idx="minor">
+            <a:schemeClr val="lt1"/>
+          </a:fontRef>
+        </p:style>
+        <p:txBody>
+          <a:bodyPr rtlCol="0" anchor="ctr"/>
+          <a:lstStyle/>
+          <a:p>
+            <a:pPr algn="ctr"/>
+          </a:p>
+        </p:txBody>
+      </p:sp>
+      <p:sp>
+        <p:nvSpPr>
+          <p:cNvPr id="13" name="TextBox 12"/>
+          <p:cNvSpPr txBox="1"/>
+          <p:nvPr/>
+        </p:nvSpPr>
+        <p:spPr>
+          <a:xfrm>
+            <a:off x="914400" y="5029200"/>
+            <a:ext cx="10515600" cy="868680"/>
+          </a:xfrm>
+          <a:prstGeom prst="rect">
+            <a:avLst/>
+          </a:prstGeom>
+          <a:noFill/>
+        </p:spPr>
+        <p:txBody>
+          <a:bodyPr wrap="square">
+            <a:spAutoFit/>
+          </a:bodyPr>
+          <a:lstStyle/>
+          <a:p>
+            <a:pPr algn="l">
+              <a:defRPr sz="1800" b="0" i="0">
+                <a:solidFill>
+                  <a:srgbClr val="E8ECF4"/>
+                </a:solidFill>
+                <a:latin typeface="Arial"/>
+              </a:defRPr>
+            </a:pPr>
+            <a:r>
+              <a:t>All commands consuming JSON from previous steps</a:t>
+            </a:r>
+          </a:p>
+        </p:txBody>
+      </p:sp>
+      <p:sp>
+        <p:nvSpPr>
+          <p:cNvPr id="14" name="Rounded Rectangle 13"/>
+          <p:cNvSpPr/>
+          <p:nvPr/>
+        </p:nvSpPr>
+        <p:spPr>
+          <a:xfrm>
+            <a:off x="548640" y="6035040"/>
+            <a:ext cx="10972800" cy="640080"/>
+          </a:xfrm>
+          <a:prstGeom prst="roundRect">
+            <a:avLst/>
+          </a:prstGeom>
+          <a:solidFill>
+            <a:srgbClr val="0A0D12"/>
+          </a:solidFill>
+          <a:ln>
+            <a:solidFill>
+              <a:srgbClr val="313244"/>
+            </a:solidFill>
+          </a:ln>
+        </p:spPr>
+        <p:style>
+          <a:lnRef idx="1">
+            <a:schemeClr val="accent1"/>
+          </a:lnRef>
+          <a:fillRef idx="3">
+            <a:schemeClr val="accent1"/>
+          </a:fillRef>
+          <a:effectRef idx="2">
+            <a:schemeClr val="accent1"/>
+          </a:effectRef>
+          <a:fontRef idx="minor">
+            <a:schemeClr val="lt1"/>
+          </a:fontRef>
+        </p:style>
+        <p:txBody>
+          <a:bodyPr rtlCol="0" anchor="ctr"/>
+          <a:lstStyle/>
+          <a:p>
+            <a:pPr algn="ctr"/>
+          </a:p>
+        </p:txBody>
+      </p:sp>
+      <p:sp>
+        <p:nvSpPr>
+          <p:cNvPr id="15" name="TextBox 14"/>
+          <p:cNvSpPr txBox="1"/>
+          <p:nvPr/>
+        </p:nvSpPr>
+        <p:spPr>
+          <a:xfrm>
+            <a:off x="777240" y="6144768"/>
+            <a:ext cx="10515600" cy="457200"/>
+          </a:xfrm>
+          <a:prstGeom prst="rect">
+            <a:avLst/>
+          </a:prstGeom>
+          <a:noFill/>
+        </p:spPr>
+        <p:txBody>
+          <a:bodyPr wrap="square">
+            <a:spAutoFit/>
+          </a:bodyPr>
+          <a:lstStyle/>
+          <a:p>
+            <a:pPr algn="l">
+              <a:defRPr sz="1400" b="0" i="0">
+                <a:solidFill>
+                  <a:srgbClr val="E8ECF4"/>
+                </a:solidFill>
+                <a:latin typeface="Courier New"/>
+              </a:defRPr>
+            </a:pPr>
+            <a:r>
+              <a:t>Quick test:   /plan-event "Topic"  --&gt;  /build-schedule  --&gt;  /draft-announcement</a:t>
+            </a:r>
+          </a:p>
+        </p:txBody>
+      </p:sp>
+      <p:sp>
+        <p:nvSpPr>
+          <p:cNvPr id="16" name="TextBox 15"/>
           <p:cNvSpPr txBox="1"/>
           <p:nvPr/>
         </p:nvSpPr>
@@ -10526,7 +11081,7 @@
               </a:defRPr>
             </a:pPr>
             <a:r>
-              <a:t>Recap</a:t>
+              <a:t>What's Next — Session 3</a:t>
             </a:r>
           </a:p>
         </p:txBody>
@@ -10576,13 +11131,49 @@
       </p:sp>
       <p:sp>
         <p:nvSpPr>
-          <p:cNvPr id="5" name="Rectangle 4"/>
+          <p:cNvPr id="5" name="TextBox 4"/>
+          <p:cNvSpPr txBox="1"/>
+          <p:nvPr/>
+        </p:nvSpPr>
+        <p:spPr>
+          <a:xfrm>
+            <a:off x="548640" y="1508760"/>
+            <a:ext cx="10972800" cy="640080"/>
+          </a:xfrm>
+          <a:prstGeom prst="rect">
+            <a:avLst/>
+          </a:prstGeom>
+          <a:noFill/>
+        </p:spPr>
+        <p:txBody>
+          <a:bodyPr wrap="square">
+            <a:spAutoFit/>
+          </a:bodyPr>
+          <a:lstStyle/>
+          <a:p>
+            <a:pPr algn="l">
+              <a:defRPr sz="1900" b="0" i="1">
+                <a:solidFill>
+                  <a:srgbClr val="9CA3B4"/>
+                </a:solidFill>
+                <a:latin typeface="Arial"/>
+              </a:defRPr>
+            </a:pPr>
+            <a:r>
+              <a:t>Subagents &amp; Hooks</a:t>
+            </a:r>
+          </a:p>
+        </p:txBody>
+      </p:sp>
+      <p:sp>
+        <p:nvSpPr>
+          <p:cNvPr id="6" name="Rectangle 5"/>
           <p:cNvSpPr/>
           <p:nvPr/>
         </p:nvSpPr>
         <p:spPr>
           <a:xfrm>
-            <a:off x="548640" y="1673351"/>
+            <a:off x="548640" y="2450592"/>
             <a:ext cx="109728" cy="109728"/>
           </a:xfrm>
           <a:prstGeom prst="rect">
@@ -10619,13 +11210,13 @@
       </p:sp>
       <p:sp>
         <p:nvSpPr>
-          <p:cNvPr id="6" name="TextBox 5"/>
+          <p:cNvPr id="7" name="TextBox 6"/>
           <p:cNvSpPr txBox="1"/>
           <p:nvPr/>
         </p:nvSpPr>
         <p:spPr>
           <a:xfrm>
-            <a:off x="914400" y="1508760"/>
+            <a:off x="914400" y="2286000"/>
             <a:ext cx="10515600" cy="868680"/>
           </a:xfrm>
           <a:prstGeom prst="rect">
@@ -10648,20 +11239,20 @@
               </a:defRPr>
             </a:pPr>
             <a:r>
-              <a:t>Context engineering &gt; prompt engineering — give the AI everything it needs</a:t>
-            </a:r>
-          </a:p>
-        </p:txBody>
-      </p:sp>
-      <p:sp>
-        <p:nvSpPr>
-          <p:cNvPr id="7" name="Rectangle 6"/>
+              <a:t>Subagents — split into specialists (schedule optimizer, comms reviewer, quality checker)</a:t>
+            </a:r>
+          </a:p>
+        </p:txBody>
+      </p:sp>
+      <p:sp>
+        <p:nvSpPr>
+          <p:cNvPr id="8" name="Rectangle 7"/>
           <p:cNvSpPr/>
           <p:nvPr/>
         </p:nvSpPr>
         <p:spPr>
           <a:xfrm>
-            <a:off x="548640" y="2587752"/>
+            <a:off x="548640" y="3364992"/>
             <a:ext cx="109728" cy="109728"/>
           </a:xfrm>
           <a:prstGeom prst="rect">
@@ -10698,13 +11289,13 @@
       </p:sp>
       <p:sp>
         <p:nvSpPr>
-          <p:cNvPr id="8" name="TextBox 7"/>
+          <p:cNvPr id="9" name="TextBox 8"/>
           <p:cNvSpPr txBox="1"/>
           <p:nvPr/>
         </p:nvSpPr>
         <p:spPr>
           <a:xfrm>
-            <a:off x="914400" y="2423160"/>
+            <a:off x="914400" y="3200400"/>
             <a:ext cx="10515600" cy="868680"/>
           </a:xfrm>
           <a:prstGeom prst="rect">
@@ -10727,21 +11318,119 @@
               </a:defRPr>
             </a:pPr>
             <a:r>
-              <a:t>INITIAL.md → PRP → Execute — describe WHAT, generate HOW, execute</a:t>
-            </a:r>
-          </a:p>
-        </p:txBody>
-      </p:sp>
-      <p:sp>
-        <p:nvSpPr>
-          <p:cNvPr id="9" name="Rectangle 8"/>
+              <a:t>Hooks — automate checks that run on every command</a:t>
+            </a:r>
+          </a:p>
+        </p:txBody>
+      </p:sp>
+      <p:sp>
+        <p:nvSpPr>
+          <p:cNvPr id="10" name="TextBox 9"/>
+          <p:cNvSpPr txBox="1"/>
+          <p:nvPr/>
+        </p:nvSpPr>
+        <p:spPr>
+          <a:xfrm>
+            <a:off x="548640" y="6126480"/>
+            <a:ext cx="10972800" cy="365760"/>
+          </a:xfrm>
+          <a:prstGeom prst="rect">
+            <a:avLst/>
+          </a:prstGeom>
+          <a:noFill/>
+        </p:spPr>
+        <p:txBody>
+          <a:bodyPr wrap="square">
+            <a:spAutoFit/>
+          </a:bodyPr>
+          <a:lstStyle/>
+          <a:p>
+            <a:pPr algn="l">
+              <a:defRPr sz="1400" b="0" i="1">
+                <a:solidFill>
+                  <a:srgbClr val="9CA3B4"/>
+                </a:solidFill>
+                <a:latin typeface="Arial"/>
+              </a:defRPr>
+            </a:pPr>
+            <a:r>
+              <a:t>Right now, one agent does everything. Next session: a coordinated team.</a:t>
+            </a:r>
+          </a:p>
+        </p:txBody>
+      </p:sp>
+      <p:sp>
+        <p:nvSpPr>
+          <p:cNvPr id="11" name="TextBox 10"/>
+          <p:cNvSpPr txBox="1"/>
+          <p:nvPr/>
+        </p:nvSpPr>
+        <p:spPr>
+          <a:xfrm>
+            <a:off x="11430000" y="6446520"/>
+            <a:ext cx="457200" cy="274320"/>
+          </a:xfrm>
+          <a:prstGeom prst="rect">
+            <a:avLst/>
+          </a:prstGeom>
+          <a:noFill/>
+        </p:spPr>
+        <p:txBody>
+          <a:bodyPr wrap="square">
+            <a:spAutoFit/>
+          </a:bodyPr>
+          <a:lstStyle/>
+          <a:p>
+            <a:pPr algn="r">
+              <a:defRPr sz="1100" b="0" i="0">
+                <a:solidFill>
+                  <a:srgbClr val="9CA3B4"/>
+                </a:solidFill>
+                <a:latin typeface="Arial"/>
+              </a:defRPr>
+            </a:pPr>
+            <a:r>
+              <a:t>22</a:t>
+            </a:r>
+          </a:p>
+        </p:txBody>
+      </p:sp>
+    </p:spTree>
+  </p:cSld>
+  <p:clrMapOvr>
+    <a:masterClrMapping/>
+  </p:clrMapOvr>
+</p:sld>
+</file>
+
+<file path=ppt/slides/slide23.xml><?xml version="1.0" encoding="utf-8"?>
+<p:sld xmlns:a="http://schemas.openxmlformats.org/drawingml/2006/main" xmlns:p="http://schemas.openxmlformats.org/presentationml/2006/main" xmlns:r="http://schemas.openxmlformats.org/officeDocument/2006/relationships">
+  <p:cSld>
+    <p:bg>
+      <p:bgPr>
+        <a:solidFill>
+          <a:srgbClr val="0F1219"/>
+        </a:solidFill>
+        <a:effectLst/>
+      </p:bgPr>
+    </p:bg>
+    <p:spTree>
+      <p:nvGrpSpPr>
+        <p:cNvPr id="1" name=""/>
+        <p:cNvGrpSpPr/>
+        <p:nvPr/>
+      </p:nvGrpSpPr>
+      <p:grpSpPr/>
+      <p:sp>
+        <p:nvSpPr>
+          <p:cNvPr id="2" name="Rectangle 1"/>
           <p:cNvSpPr/>
           <p:nvPr/>
         </p:nvSpPr>
         <p:spPr>
           <a:xfrm>
-            <a:off x="548640" y="3502152"/>
-            <a:ext cx="109728" cy="109728"/>
+            <a:off x="0" y="0"/>
+            <a:ext cx="73152" cy="6858000"/>
           </a:xfrm>
           <a:prstGeom prst="rect">
             <a:avLst/>
@@ -10777,6 +11466,286 @@
       </p:sp>
       <p:sp>
         <p:nvSpPr>
+          <p:cNvPr id="3" name="TextBox 2"/>
+          <p:cNvSpPr txBox="1"/>
+          <p:nvPr/>
+        </p:nvSpPr>
+        <p:spPr>
+          <a:xfrm>
+            <a:off x="548640" y="365760"/>
+            <a:ext cx="10972800" cy="822960"/>
+          </a:xfrm>
+          <a:prstGeom prst="rect">
+            <a:avLst/>
+          </a:prstGeom>
+          <a:noFill/>
+        </p:spPr>
+        <p:txBody>
+          <a:bodyPr wrap="square">
+            <a:spAutoFit/>
+          </a:bodyPr>
+          <a:lstStyle/>
+          <a:p>
+            <a:pPr algn="l">
+              <a:defRPr sz="3200" b="1" i="0">
+                <a:solidFill>
+                  <a:srgbClr val="E8ECF4"/>
+                </a:solidFill>
+                <a:latin typeface="Arial"/>
+              </a:defRPr>
+            </a:pPr>
+            <a:r>
+              <a:t>Recap</a:t>
+            </a:r>
+          </a:p>
+        </p:txBody>
+      </p:sp>
+      <p:sp>
+        <p:nvSpPr>
+          <p:cNvPr id="4" name="Rectangle 3"/>
+          <p:cNvSpPr/>
+          <p:nvPr/>
+        </p:nvSpPr>
+        <p:spPr>
+          <a:xfrm>
+            <a:off x="548640" y="1207008"/>
+            <a:ext cx="2286000" cy="54864"/>
+          </a:xfrm>
+          <a:prstGeom prst="rect">
+            <a:avLst/>
+          </a:prstGeom>
+          <a:solidFill>
+            <a:srgbClr val="5B9CF5"/>
+          </a:solidFill>
+          <a:ln>
+            <a:noFill/>
+          </a:ln>
+        </p:spPr>
+        <p:style>
+          <a:lnRef idx="1">
+            <a:schemeClr val="accent1"/>
+          </a:lnRef>
+          <a:fillRef idx="3">
+            <a:schemeClr val="accent1"/>
+          </a:fillRef>
+          <a:effectRef idx="2">
+            <a:schemeClr val="accent1"/>
+          </a:effectRef>
+          <a:fontRef idx="minor">
+            <a:schemeClr val="lt1"/>
+          </a:fontRef>
+        </p:style>
+        <p:txBody>
+          <a:bodyPr rtlCol="0" anchor="ctr"/>
+          <a:lstStyle/>
+          <a:p>
+            <a:pPr algn="ctr"/>
+          </a:p>
+        </p:txBody>
+      </p:sp>
+      <p:sp>
+        <p:nvSpPr>
+          <p:cNvPr id="5" name="Rectangle 4"/>
+          <p:cNvSpPr/>
+          <p:nvPr/>
+        </p:nvSpPr>
+        <p:spPr>
+          <a:xfrm>
+            <a:off x="548640" y="1673351"/>
+            <a:ext cx="109728" cy="109728"/>
+          </a:xfrm>
+          <a:prstGeom prst="rect">
+            <a:avLst/>
+          </a:prstGeom>
+          <a:solidFill>
+            <a:srgbClr val="E8853D"/>
+          </a:solidFill>
+          <a:ln>
+            <a:noFill/>
+          </a:ln>
+        </p:spPr>
+        <p:style>
+          <a:lnRef idx="1">
+            <a:schemeClr val="accent1"/>
+          </a:lnRef>
+          <a:fillRef idx="3">
+            <a:schemeClr val="accent1"/>
+          </a:fillRef>
+          <a:effectRef idx="2">
+            <a:schemeClr val="accent1"/>
+          </a:effectRef>
+          <a:fontRef idx="minor">
+            <a:schemeClr val="lt1"/>
+          </a:fontRef>
+        </p:style>
+        <p:txBody>
+          <a:bodyPr rtlCol="0" anchor="ctr"/>
+          <a:lstStyle/>
+          <a:p>
+            <a:pPr algn="ctr"/>
+          </a:p>
+        </p:txBody>
+      </p:sp>
+      <p:sp>
+        <p:nvSpPr>
+          <p:cNvPr id="6" name="TextBox 5"/>
+          <p:cNvSpPr txBox="1"/>
+          <p:nvPr/>
+        </p:nvSpPr>
+        <p:spPr>
+          <a:xfrm>
+            <a:off x="914400" y="1508760"/>
+            <a:ext cx="10515600" cy="868680"/>
+          </a:xfrm>
+          <a:prstGeom prst="rect">
+            <a:avLst/>
+          </a:prstGeom>
+          <a:noFill/>
+        </p:spPr>
+        <p:txBody>
+          <a:bodyPr wrap="square">
+            <a:spAutoFit/>
+          </a:bodyPr>
+          <a:lstStyle/>
+          <a:p>
+            <a:pPr algn="l">
+              <a:defRPr sz="1800" b="0" i="0">
+                <a:solidFill>
+                  <a:srgbClr val="E8ECF4"/>
+                </a:solidFill>
+                <a:latin typeface="Arial"/>
+              </a:defRPr>
+            </a:pPr>
+            <a:r>
+              <a:t>Context engineering &gt; prompt engineering — give the AI everything it needs</a:t>
+            </a:r>
+          </a:p>
+        </p:txBody>
+      </p:sp>
+      <p:sp>
+        <p:nvSpPr>
+          <p:cNvPr id="7" name="Rectangle 6"/>
+          <p:cNvSpPr/>
+          <p:nvPr/>
+        </p:nvSpPr>
+        <p:spPr>
+          <a:xfrm>
+            <a:off x="548640" y="2587752"/>
+            <a:ext cx="109728" cy="109728"/>
+          </a:xfrm>
+          <a:prstGeom prst="rect">
+            <a:avLst/>
+          </a:prstGeom>
+          <a:solidFill>
+            <a:srgbClr val="E8853D"/>
+          </a:solidFill>
+          <a:ln>
+            <a:noFill/>
+          </a:ln>
+        </p:spPr>
+        <p:style>
+          <a:lnRef idx="1">
+            <a:schemeClr val="accent1"/>
+          </a:lnRef>
+          <a:fillRef idx="3">
+            <a:schemeClr val="accent1"/>
+          </a:fillRef>
+          <a:effectRef idx="2">
+            <a:schemeClr val="accent1"/>
+          </a:effectRef>
+          <a:fontRef idx="minor">
+            <a:schemeClr val="lt1"/>
+          </a:fontRef>
+        </p:style>
+        <p:txBody>
+          <a:bodyPr rtlCol="0" anchor="ctr"/>
+          <a:lstStyle/>
+          <a:p>
+            <a:pPr algn="ctr"/>
+          </a:p>
+        </p:txBody>
+      </p:sp>
+      <p:sp>
+        <p:nvSpPr>
+          <p:cNvPr id="8" name="TextBox 7"/>
+          <p:cNvSpPr txBox="1"/>
+          <p:nvPr/>
+        </p:nvSpPr>
+        <p:spPr>
+          <a:xfrm>
+            <a:off x="914400" y="2423160"/>
+            <a:ext cx="10515600" cy="868680"/>
+          </a:xfrm>
+          <a:prstGeom prst="rect">
+            <a:avLst/>
+          </a:prstGeom>
+          <a:noFill/>
+        </p:spPr>
+        <p:txBody>
+          <a:bodyPr wrap="square">
+            <a:spAutoFit/>
+          </a:bodyPr>
+          <a:lstStyle/>
+          <a:p>
+            <a:pPr algn="l">
+              <a:defRPr sz="1800" b="0" i="0">
+                <a:solidFill>
+                  <a:srgbClr val="E8ECF4"/>
+                </a:solidFill>
+                <a:latin typeface="Arial"/>
+              </a:defRPr>
+            </a:pPr>
+            <a:r>
+              <a:t>INITIAL.md → PRP → Execute — describe WHAT, generate HOW, execute</a:t>
+            </a:r>
+          </a:p>
+        </p:txBody>
+      </p:sp>
+      <p:sp>
+        <p:nvSpPr>
+          <p:cNvPr id="9" name="Rectangle 8"/>
+          <p:cNvSpPr/>
+          <p:nvPr/>
+        </p:nvSpPr>
+        <p:spPr>
+          <a:xfrm>
+            <a:off x="548640" y="3502152"/>
+            <a:ext cx="109728" cy="109728"/>
+          </a:xfrm>
+          <a:prstGeom prst="rect">
+            <a:avLst/>
+          </a:prstGeom>
+          <a:solidFill>
+            <a:srgbClr val="E8853D"/>
+          </a:solidFill>
+          <a:ln>
+            <a:noFill/>
+          </a:ln>
+        </p:spPr>
+        <p:style>
+          <a:lnRef idx="1">
+            <a:schemeClr val="accent1"/>
+          </a:lnRef>
+          <a:fillRef idx="3">
+            <a:schemeClr val="accent1"/>
+          </a:fillRef>
+          <a:effectRef idx="2">
+            <a:schemeClr val="accent1"/>
+          </a:effectRef>
+          <a:fontRef idx="minor">
+            <a:schemeClr val="lt1"/>
+          </a:fontRef>
+        </p:style>
+        <p:txBody>
+          <a:bodyPr rtlCol="0" anchor="ctr"/>
+          <a:lstStyle/>
+          <a:p>
+            <a:pPr algn="ctr"/>
+          </a:p>
+        </p:txBody>
+      </p:sp>
+      <p:sp>
+        <p:nvSpPr>
           <p:cNvPr id="10" name="TextBox 9"/>
           <p:cNvSpPr txBox="1"/>
           <p:nvPr/>
@@ -10842,7 +11811,7 @@
               </a:defRPr>
             </a:pPr>
             <a:r>
-              <a:t>22</a:t>
+              <a:t>23</a:t>
             </a:r>
           </a:p>
         </p:txBody>
